--- a/Presentations/3-final_presentation.pptx
+++ b/Presentations/3-final_presentation.pptx
@@ -5,40 +5,44 @@
     <p:sldMasterId id="2147483659" r:id="rId1"/>
   </p:sldMasterIdLst>
   <p:notesMasterIdLst>
-    <p:notesMasterId r:id="rId9"/>
+    <p:notesMasterId r:id="rId13"/>
   </p:notesMasterIdLst>
   <p:sldIdLst>
     <p:sldId id="256" r:id="rId2"/>
-    <p:sldId id="268" r:id="rId3"/>
-    <p:sldId id="269" r:id="rId4"/>
-    <p:sldId id="271" r:id="rId5"/>
-    <p:sldId id="272" r:id="rId6"/>
-    <p:sldId id="267" r:id="rId7"/>
-    <p:sldId id="270" r:id="rId8"/>
+    <p:sldId id="275" r:id="rId3"/>
+    <p:sldId id="274" r:id="rId4"/>
+    <p:sldId id="268" r:id="rId5"/>
+    <p:sldId id="269" r:id="rId6"/>
+    <p:sldId id="273" r:id="rId7"/>
+    <p:sldId id="271" r:id="rId8"/>
+    <p:sldId id="276" r:id="rId9"/>
+    <p:sldId id="272" r:id="rId10"/>
+    <p:sldId id="277" r:id="rId11"/>
+    <p:sldId id="270" r:id="rId12"/>
   </p:sldIdLst>
   <p:sldSz cx="12192000" cy="6858000"/>
   <p:notesSz cx="6858000" cy="9144000"/>
   <p:embeddedFontLst>
     <p:embeddedFont>
       <p:font typeface="Inter" panose="020B0604020202020204" charset="0"/>
-      <p:regular r:id="rId10"/>
-      <p:bold r:id="rId11"/>
-      <p:italic r:id="rId12"/>
-      <p:boldItalic r:id="rId13"/>
-    </p:embeddedFont>
-    <p:embeddedFont>
-      <p:font typeface="Inter SemiBold" panose="020B0604020202020204" charset="0"/>
       <p:regular r:id="rId14"/>
       <p:bold r:id="rId15"/>
       <p:italic r:id="rId16"/>
       <p:boldItalic r:id="rId17"/>
     </p:embeddedFont>
     <p:embeddedFont>
-      <p:font typeface="Urbanist" panose="020B0604020202020204" charset="0"/>
+      <p:font typeface="Inter SemiBold" panose="020B0604020202020204" charset="0"/>
       <p:regular r:id="rId18"/>
       <p:bold r:id="rId19"/>
       <p:italic r:id="rId20"/>
       <p:boldItalic r:id="rId21"/>
+    </p:embeddedFont>
+    <p:embeddedFont>
+      <p:font typeface="Urbanist" panose="020B0604020202020204" charset="0"/>
+      <p:regular r:id="rId22"/>
+      <p:bold r:id="rId23"/>
+      <p:italic r:id="rId24"/>
+      <p:boldItalic r:id="rId25"/>
     </p:embeddedFont>
   </p:embeddedFontLst>
   <p:defaultTextStyle>
@@ -848,15 +852,15 @@
 </p:notes>
 </file>
 
-<file path=ppt/notesSlides/notesSlide2.xml><?xml version="1.0" encoding="utf-8"?>
+<file path=ppt/notesSlides/notesSlide10.xml><?xml version="1.0" encoding="utf-8"?>
 <p:notes xmlns:a="http://schemas.openxmlformats.org/drawingml/2006/main" xmlns:r="http://schemas.openxmlformats.org/officeDocument/2006/relationships" xmlns:p="http://schemas.openxmlformats.org/presentationml/2006/main" showMasterSp="0" showMasterPhAnim="0">
   <p:cSld>
     <p:spTree>
       <p:nvGrpSpPr>
-        <p:cNvPr id="1" name="Shape 119">
+        <p:cNvPr id="1" name="Shape 80">
           <a:extLst>
             <a:ext uri="{FF2B5EF4-FFF2-40B4-BE49-F238E27FC236}">
-              <a16:creationId xmlns:a16="http://schemas.microsoft.com/office/drawing/2014/main" id="{2E5E52ED-B292-98A3-9EF7-091FF91828E3}"/>
+              <a16:creationId xmlns:a16="http://schemas.microsoft.com/office/drawing/2014/main" id="{9084205C-3E22-B54C-96B3-DF28C8D8C443}"/>
             </a:ext>
           </a:extLst>
         </p:cNvPr>
@@ -873,10 +877,10 @@
       </p:grpSpPr>
       <p:sp>
         <p:nvSpPr>
-          <p:cNvPr id="120" name="Google Shape;120;p3:notes">
+          <p:cNvPr id="81" name="Google Shape;81;p1:notes">
             <a:extLst>
               <a:ext uri="{FF2B5EF4-FFF2-40B4-BE49-F238E27FC236}">
-                <a16:creationId xmlns:a16="http://schemas.microsoft.com/office/drawing/2014/main" id="{042BFBBD-7FD2-C1DA-F26A-C284F515A5A7}"/>
+                <a16:creationId xmlns:a16="http://schemas.microsoft.com/office/drawing/2014/main" id="{1050EB1E-2A3B-64B4-591B-EF52066A0B0F}"/>
               </a:ext>
             </a:extLst>
           </p:cNvPr>
@@ -917,10 +921,10 @@
       </p:sp>
       <p:sp>
         <p:nvSpPr>
-          <p:cNvPr id="121" name="Google Shape;121;p3:notes">
+          <p:cNvPr id="82" name="Google Shape;82;p1:notes">
             <a:extLst>
               <a:ext uri="{FF2B5EF4-FFF2-40B4-BE49-F238E27FC236}">
-                <a16:creationId xmlns:a16="http://schemas.microsoft.com/office/drawing/2014/main" id="{FBD53C8A-DA3A-5CBD-EA87-F6A38CE90B96}"/>
+                <a16:creationId xmlns:a16="http://schemas.microsoft.com/office/drawing/2014/main" id="{61B75D58-FB54-3ECE-8EA5-3F2A10B56C6E}"/>
               </a:ext>
             </a:extLst>
           </p:cNvPr>
@@ -972,7 +976,7 @@
     </p:spTree>
     <p:extLst>
       <p:ext uri="{BB962C8B-B14F-4D97-AF65-F5344CB8AC3E}">
-        <p14:creationId xmlns:p14="http://schemas.microsoft.com/office/powerpoint/2010/main" val="4012124846"/>
+        <p14:creationId xmlns:p14="http://schemas.microsoft.com/office/powerpoint/2010/main" val="4273759065"/>
       </p:ext>
     </p:extLst>
   </p:cSld>
@@ -982,7 +986,7 @@
 </p:notes>
 </file>
 
-<file path=ppt/notesSlides/notesSlide3.xml><?xml version="1.0" encoding="utf-8"?>
+<file path=ppt/notesSlides/notesSlide11.xml><?xml version="1.0" encoding="utf-8"?>
 <p:notes xmlns:a="http://schemas.openxmlformats.org/drawingml/2006/main" xmlns:r="http://schemas.openxmlformats.org/officeDocument/2006/relationships" xmlns:p="http://schemas.openxmlformats.org/presentationml/2006/main" showMasterSp="0" showMasterPhAnim="0">
   <p:cSld>
     <p:spTree>
@@ -990,7 +994,7 @@
         <p:cNvPr id="1" name="Shape 119">
           <a:extLst>
             <a:ext uri="{FF2B5EF4-FFF2-40B4-BE49-F238E27FC236}">
-              <a16:creationId xmlns:a16="http://schemas.microsoft.com/office/drawing/2014/main" id="{3D3E236F-4684-16ED-2A7C-DB8AC362BE80}"/>
+              <a16:creationId xmlns:a16="http://schemas.microsoft.com/office/drawing/2014/main" id="{FAD83F17-DCFD-6745-448E-1259A404C504}"/>
             </a:ext>
           </a:extLst>
         </p:cNvPr>
@@ -1010,7 +1014,7 @@
           <p:cNvPr id="120" name="Google Shape;120;p3:notes">
             <a:extLst>
               <a:ext uri="{FF2B5EF4-FFF2-40B4-BE49-F238E27FC236}">
-                <a16:creationId xmlns:a16="http://schemas.microsoft.com/office/drawing/2014/main" id="{8AEBF301-E57D-DBA3-3007-EEECD1612DC0}"/>
+                <a16:creationId xmlns:a16="http://schemas.microsoft.com/office/drawing/2014/main" id="{128B49B5-4DC8-B1CD-B002-2E023B1AFF7D}"/>
               </a:ext>
             </a:extLst>
           </p:cNvPr>
@@ -1054,7 +1058,7 @@
           <p:cNvPr id="121" name="Google Shape;121;p3:notes">
             <a:extLst>
               <a:ext uri="{FF2B5EF4-FFF2-40B4-BE49-F238E27FC236}">
-                <a16:creationId xmlns:a16="http://schemas.microsoft.com/office/drawing/2014/main" id="{9B0A1CD8-A3B2-CB96-5861-782338FF9FB7}"/>
+                <a16:creationId xmlns:a16="http://schemas.microsoft.com/office/drawing/2014/main" id="{0C423171-0A09-B9DB-FA4C-BCDFF075D0C8}"/>
               </a:ext>
             </a:extLst>
           </p:cNvPr>
@@ -1106,7 +1110,275 @@
     </p:spTree>
     <p:extLst>
       <p:ext uri="{BB962C8B-B14F-4D97-AF65-F5344CB8AC3E}">
-        <p14:creationId xmlns:p14="http://schemas.microsoft.com/office/powerpoint/2010/main" val="2714520273"/>
+        <p14:creationId xmlns:p14="http://schemas.microsoft.com/office/powerpoint/2010/main" val="4264504045"/>
+      </p:ext>
+    </p:extLst>
+  </p:cSld>
+  <p:clrMapOvr>
+    <a:masterClrMapping/>
+  </p:clrMapOvr>
+</p:notes>
+</file>
+
+<file path=ppt/notesSlides/notesSlide2.xml><?xml version="1.0" encoding="utf-8"?>
+<p:notes xmlns:a="http://schemas.openxmlformats.org/drawingml/2006/main" xmlns:r="http://schemas.openxmlformats.org/officeDocument/2006/relationships" xmlns:p="http://schemas.openxmlformats.org/presentationml/2006/main" showMasterSp="0" showMasterPhAnim="0">
+  <p:cSld>
+    <p:spTree>
+      <p:nvGrpSpPr>
+        <p:cNvPr id="1" name="Shape 119">
+          <a:extLst>
+            <a:ext uri="{FF2B5EF4-FFF2-40B4-BE49-F238E27FC236}">
+              <a16:creationId xmlns:a16="http://schemas.microsoft.com/office/drawing/2014/main" id="{45F5696A-8E3C-3004-E70A-96B0C130B0B0}"/>
+            </a:ext>
+          </a:extLst>
+        </p:cNvPr>
+        <p:cNvGrpSpPr/>
+        <p:nvPr/>
+      </p:nvGrpSpPr>
+      <p:grpSpPr>
+        <a:xfrm>
+          <a:off x="0" y="0"/>
+          <a:ext cx="0" cy="0"/>
+          <a:chOff x="0" y="0"/>
+          <a:chExt cx="0" cy="0"/>
+        </a:xfrm>
+      </p:grpSpPr>
+      <p:sp>
+        <p:nvSpPr>
+          <p:cNvPr id="120" name="Google Shape;120;p3:notes">
+            <a:extLst>
+              <a:ext uri="{FF2B5EF4-FFF2-40B4-BE49-F238E27FC236}">
+                <a16:creationId xmlns:a16="http://schemas.microsoft.com/office/drawing/2014/main" id="{E3280AFE-13BD-D1F3-9C0B-ADD30C05EC26}"/>
+              </a:ext>
+            </a:extLst>
+          </p:cNvPr>
+          <p:cNvSpPr txBox="1">
+            <a:spLocks noGrp="1"/>
+          </p:cNvSpPr>
+          <p:nvPr>
+            <p:ph type="body" idx="1"/>
+          </p:nvPr>
+        </p:nvSpPr>
+        <p:spPr>
+          <a:xfrm>
+            <a:off x="685800" y="4343400"/>
+            <a:ext cx="5486400" cy="4114800"/>
+          </a:xfrm>
+          <a:prstGeom prst="rect">
+            <a:avLst/>
+          </a:prstGeom>
+        </p:spPr>
+        <p:txBody>
+          <a:bodyPr spcFirstLastPara="1" wrap="square" lIns="91425" tIns="91425" rIns="91425" bIns="91425" anchor="t" anchorCtr="0">
+            <a:noAutofit/>
+          </a:bodyPr>
+          <a:lstStyle/>
+          <a:p>
+            <a:pPr marL="0" lvl="0" indent="0" algn="l" rtl="0">
+              <a:spcBef>
+                <a:spcPts val="0"/>
+              </a:spcBef>
+              <a:spcAft>
+                <a:spcPts val="0"/>
+              </a:spcAft>
+              <a:buNone/>
+            </a:pPr>
+            <a:endParaRPr/>
+          </a:p>
+        </p:txBody>
+      </p:sp>
+      <p:sp>
+        <p:nvSpPr>
+          <p:cNvPr id="121" name="Google Shape;121;p3:notes">
+            <a:extLst>
+              <a:ext uri="{FF2B5EF4-FFF2-40B4-BE49-F238E27FC236}">
+                <a16:creationId xmlns:a16="http://schemas.microsoft.com/office/drawing/2014/main" id="{C1BDC24C-DF0C-6FDD-FC0D-34849E94CA9C}"/>
+              </a:ext>
+            </a:extLst>
+          </p:cNvPr>
+          <p:cNvSpPr>
+            <a:spLocks noGrp="1" noRot="1" noChangeAspect="1"/>
+          </p:cNvSpPr>
+          <p:nvPr>
+            <p:ph type="sldImg" idx="2"/>
+          </p:nvPr>
+        </p:nvSpPr>
+        <p:spPr>
+          <a:xfrm>
+            <a:off x="381000" y="685800"/>
+            <a:ext cx="6096000" cy="3429000"/>
+          </a:xfrm>
+          <a:custGeom>
+            <a:avLst/>
+            <a:gdLst/>
+            <a:ahLst/>
+            <a:cxnLst/>
+            <a:rect l="l" t="t" r="r" b="b"/>
+            <a:pathLst>
+              <a:path w="120000" h="120000" extrusionOk="0">
+                <a:moveTo>
+                  <a:pt x="0" y="0"/>
+                </a:moveTo>
+                <a:lnTo>
+                  <a:pt x="120000" y="0"/>
+                </a:lnTo>
+                <a:lnTo>
+                  <a:pt x="120000" y="120000"/>
+                </a:lnTo>
+                <a:lnTo>
+                  <a:pt x="0" y="120000"/>
+                </a:lnTo>
+                <a:close/>
+              </a:path>
+            </a:pathLst>
+          </a:custGeom>
+        </p:spPr>
+        <p:txBody>
+          <a:bodyPr/>
+          <a:lstStyle/>
+          <a:p>
+            <a:endParaRPr lang="LID4096"/>
+          </a:p>
+        </p:txBody>
+      </p:sp>
+    </p:spTree>
+    <p:extLst>
+      <p:ext uri="{BB962C8B-B14F-4D97-AF65-F5344CB8AC3E}">
+        <p14:creationId xmlns:p14="http://schemas.microsoft.com/office/powerpoint/2010/main" val="3771540777"/>
+      </p:ext>
+    </p:extLst>
+  </p:cSld>
+  <p:clrMapOvr>
+    <a:masterClrMapping/>
+  </p:clrMapOvr>
+</p:notes>
+</file>
+
+<file path=ppt/notesSlides/notesSlide3.xml><?xml version="1.0" encoding="utf-8"?>
+<p:notes xmlns:a="http://schemas.openxmlformats.org/drawingml/2006/main" xmlns:r="http://schemas.openxmlformats.org/officeDocument/2006/relationships" xmlns:p="http://schemas.openxmlformats.org/presentationml/2006/main" showMasterSp="0" showMasterPhAnim="0">
+  <p:cSld>
+    <p:spTree>
+      <p:nvGrpSpPr>
+        <p:cNvPr id="1" name="Shape 119">
+          <a:extLst>
+            <a:ext uri="{FF2B5EF4-FFF2-40B4-BE49-F238E27FC236}">
+              <a16:creationId xmlns:a16="http://schemas.microsoft.com/office/drawing/2014/main" id="{1B7EFF66-9A3B-BD7E-536D-EEB6B49E9BA5}"/>
+            </a:ext>
+          </a:extLst>
+        </p:cNvPr>
+        <p:cNvGrpSpPr/>
+        <p:nvPr/>
+      </p:nvGrpSpPr>
+      <p:grpSpPr>
+        <a:xfrm>
+          <a:off x="0" y="0"/>
+          <a:ext cx="0" cy="0"/>
+          <a:chOff x="0" y="0"/>
+          <a:chExt cx="0" cy="0"/>
+        </a:xfrm>
+      </p:grpSpPr>
+      <p:sp>
+        <p:nvSpPr>
+          <p:cNvPr id="120" name="Google Shape;120;p3:notes">
+            <a:extLst>
+              <a:ext uri="{FF2B5EF4-FFF2-40B4-BE49-F238E27FC236}">
+                <a16:creationId xmlns:a16="http://schemas.microsoft.com/office/drawing/2014/main" id="{EBEC8FAD-E25B-6FFD-C3F6-2C83AA9D3204}"/>
+              </a:ext>
+            </a:extLst>
+          </p:cNvPr>
+          <p:cNvSpPr txBox="1">
+            <a:spLocks noGrp="1"/>
+          </p:cNvSpPr>
+          <p:nvPr>
+            <p:ph type="body" idx="1"/>
+          </p:nvPr>
+        </p:nvSpPr>
+        <p:spPr>
+          <a:xfrm>
+            <a:off x="685800" y="4343400"/>
+            <a:ext cx="5486400" cy="4114800"/>
+          </a:xfrm>
+          <a:prstGeom prst="rect">
+            <a:avLst/>
+          </a:prstGeom>
+        </p:spPr>
+        <p:txBody>
+          <a:bodyPr spcFirstLastPara="1" wrap="square" lIns="91425" tIns="91425" rIns="91425" bIns="91425" anchor="t" anchorCtr="0">
+            <a:noAutofit/>
+          </a:bodyPr>
+          <a:lstStyle/>
+          <a:p>
+            <a:pPr marL="0" lvl="0" indent="0" algn="l" rtl="0">
+              <a:spcBef>
+                <a:spcPts val="0"/>
+              </a:spcBef>
+              <a:spcAft>
+                <a:spcPts val="0"/>
+              </a:spcAft>
+              <a:buNone/>
+            </a:pPr>
+            <a:endParaRPr/>
+          </a:p>
+        </p:txBody>
+      </p:sp>
+      <p:sp>
+        <p:nvSpPr>
+          <p:cNvPr id="121" name="Google Shape;121;p3:notes">
+            <a:extLst>
+              <a:ext uri="{FF2B5EF4-FFF2-40B4-BE49-F238E27FC236}">
+                <a16:creationId xmlns:a16="http://schemas.microsoft.com/office/drawing/2014/main" id="{C3DAD90D-1226-C38D-76DA-7A7DAEB4DF81}"/>
+              </a:ext>
+            </a:extLst>
+          </p:cNvPr>
+          <p:cNvSpPr>
+            <a:spLocks noGrp="1" noRot="1" noChangeAspect="1"/>
+          </p:cNvSpPr>
+          <p:nvPr>
+            <p:ph type="sldImg" idx="2"/>
+          </p:nvPr>
+        </p:nvSpPr>
+        <p:spPr>
+          <a:xfrm>
+            <a:off x="381000" y="685800"/>
+            <a:ext cx="6096000" cy="3429000"/>
+          </a:xfrm>
+          <a:custGeom>
+            <a:avLst/>
+            <a:gdLst/>
+            <a:ahLst/>
+            <a:cxnLst/>
+            <a:rect l="l" t="t" r="r" b="b"/>
+            <a:pathLst>
+              <a:path w="120000" h="120000" extrusionOk="0">
+                <a:moveTo>
+                  <a:pt x="0" y="0"/>
+                </a:moveTo>
+                <a:lnTo>
+                  <a:pt x="120000" y="0"/>
+                </a:lnTo>
+                <a:lnTo>
+                  <a:pt x="120000" y="120000"/>
+                </a:lnTo>
+                <a:lnTo>
+                  <a:pt x="0" y="120000"/>
+                </a:lnTo>
+                <a:close/>
+              </a:path>
+            </a:pathLst>
+          </a:custGeom>
+        </p:spPr>
+        <p:txBody>
+          <a:bodyPr/>
+          <a:lstStyle/>
+          <a:p>
+            <a:endParaRPr lang="LID4096"/>
+          </a:p>
+        </p:txBody>
+      </p:sp>
+    </p:spTree>
+    <p:extLst>
+      <p:ext uri="{BB962C8B-B14F-4D97-AF65-F5344CB8AC3E}">
+        <p14:creationId xmlns:p14="http://schemas.microsoft.com/office/powerpoint/2010/main" val="1884569572"/>
       </p:ext>
     </p:extLst>
   </p:cSld>
@@ -1258,6 +1530,542 @@
         <p:cNvPr id="1" name="Shape 119">
           <a:extLst>
             <a:ext uri="{FF2B5EF4-FFF2-40B4-BE49-F238E27FC236}">
+              <a16:creationId xmlns:a16="http://schemas.microsoft.com/office/drawing/2014/main" id="{3D3E236F-4684-16ED-2A7C-DB8AC362BE80}"/>
+            </a:ext>
+          </a:extLst>
+        </p:cNvPr>
+        <p:cNvGrpSpPr/>
+        <p:nvPr/>
+      </p:nvGrpSpPr>
+      <p:grpSpPr>
+        <a:xfrm>
+          <a:off x="0" y="0"/>
+          <a:ext cx="0" cy="0"/>
+          <a:chOff x="0" y="0"/>
+          <a:chExt cx="0" cy="0"/>
+        </a:xfrm>
+      </p:grpSpPr>
+      <p:sp>
+        <p:nvSpPr>
+          <p:cNvPr id="120" name="Google Shape;120;p3:notes">
+            <a:extLst>
+              <a:ext uri="{FF2B5EF4-FFF2-40B4-BE49-F238E27FC236}">
+                <a16:creationId xmlns:a16="http://schemas.microsoft.com/office/drawing/2014/main" id="{8AEBF301-E57D-DBA3-3007-EEECD1612DC0}"/>
+              </a:ext>
+            </a:extLst>
+          </p:cNvPr>
+          <p:cNvSpPr txBox="1">
+            <a:spLocks noGrp="1"/>
+          </p:cNvSpPr>
+          <p:nvPr>
+            <p:ph type="body" idx="1"/>
+          </p:nvPr>
+        </p:nvSpPr>
+        <p:spPr>
+          <a:xfrm>
+            <a:off x="685800" y="4343400"/>
+            <a:ext cx="5486400" cy="4114800"/>
+          </a:xfrm>
+          <a:prstGeom prst="rect">
+            <a:avLst/>
+          </a:prstGeom>
+        </p:spPr>
+        <p:txBody>
+          <a:bodyPr spcFirstLastPara="1" wrap="square" lIns="91425" tIns="91425" rIns="91425" bIns="91425" anchor="t" anchorCtr="0">
+            <a:noAutofit/>
+          </a:bodyPr>
+          <a:lstStyle/>
+          <a:p>
+            <a:pPr marL="0" lvl="0" indent="0" algn="l" rtl="0">
+              <a:spcBef>
+                <a:spcPts val="0"/>
+              </a:spcBef>
+              <a:spcAft>
+                <a:spcPts val="0"/>
+              </a:spcAft>
+              <a:buNone/>
+            </a:pPr>
+            <a:endParaRPr/>
+          </a:p>
+        </p:txBody>
+      </p:sp>
+      <p:sp>
+        <p:nvSpPr>
+          <p:cNvPr id="121" name="Google Shape;121;p3:notes">
+            <a:extLst>
+              <a:ext uri="{FF2B5EF4-FFF2-40B4-BE49-F238E27FC236}">
+                <a16:creationId xmlns:a16="http://schemas.microsoft.com/office/drawing/2014/main" id="{9B0A1CD8-A3B2-CB96-5861-782338FF9FB7}"/>
+              </a:ext>
+            </a:extLst>
+          </p:cNvPr>
+          <p:cNvSpPr>
+            <a:spLocks noGrp="1" noRot="1" noChangeAspect="1"/>
+          </p:cNvSpPr>
+          <p:nvPr>
+            <p:ph type="sldImg" idx="2"/>
+          </p:nvPr>
+        </p:nvSpPr>
+        <p:spPr>
+          <a:xfrm>
+            <a:off x="381000" y="685800"/>
+            <a:ext cx="6096000" cy="3429000"/>
+          </a:xfrm>
+          <a:custGeom>
+            <a:avLst/>
+            <a:gdLst/>
+            <a:ahLst/>
+            <a:cxnLst/>
+            <a:rect l="l" t="t" r="r" b="b"/>
+            <a:pathLst>
+              <a:path w="120000" h="120000" extrusionOk="0">
+                <a:moveTo>
+                  <a:pt x="0" y="0"/>
+                </a:moveTo>
+                <a:lnTo>
+                  <a:pt x="120000" y="0"/>
+                </a:lnTo>
+                <a:lnTo>
+                  <a:pt x="120000" y="120000"/>
+                </a:lnTo>
+                <a:lnTo>
+                  <a:pt x="0" y="120000"/>
+                </a:lnTo>
+                <a:close/>
+              </a:path>
+            </a:pathLst>
+          </a:custGeom>
+        </p:spPr>
+        <p:txBody>
+          <a:bodyPr/>
+          <a:lstStyle/>
+          <a:p>
+            <a:endParaRPr lang="LID4096"/>
+          </a:p>
+        </p:txBody>
+      </p:sp>
+    </p:spTree>
+    <p:extLst>
+      <p:ext uri="{BB962C8B-B14F-4D97-AF65-F5344CB8AC3E}">
+        <p14:creationId xmlns:p14="http://schemas.microsoft.com/office/powerpoint/2010/main" val="2714520273"/>
+      </p:ext>
+    </p:extLst>
+  </p:cSld>
+  <p:clrMapOvr>
+    <a:masterClrMapping/>
+  </p:clrMapOvr>
+</p:notes>
+</file>
+
+<file path=ppt/notesSlides/notesSlide6.xml><?xml version="1.0" encoding="utf-8"?>
+<p:notes xmlns:a="http://schemas.openxmlformats.org/drawingml/2006/main" xmlns:r="http://schemas.openxmlformats.org/officeDocument/2006/relationships" xmlns:p="http://schemas.openxmlformats.org/presentationml/2006/main" showMasterSp="0" showMasterPhAnim="0">
+  <p:cSld>
+    <p:spTree>
+      <p:nvGrpSpPr>
+        <p:cNvPr id="1" name="Shape 119">
+          <a:extLst>
+            <a:ext uri="{FF2B5EF4-FFF2-40B4-BE49-F238E27FC236}">
+              <a16:creationId xmlns:a16="http://schemas.microsoft.com/office/drawing/2014/main" id="{57408F18-ACAC-89BE-B989-FC37B800BC32}"/>
+            </a:ext>
+          </a:extLst>
+        </p:cNvPr>
+        <p:cNvGrpSpPr/>
+        <p:nvPr/>
+      </p:nvGrpSpPr>
+      <p:grpSpPr>
+        <a:xfrm>
+          <a:off x="0" y="0"/>
+          <a:ext cx="0" cy="0"/>
+          <a:chOff x="0" y="0"/>
+          <a:chExt cx="0" cy="0"/>
+        </a:xfrm>
+      </p:grpSpPr>
+      <p:sp>
+        <p:nvSpPr>
+          <p:cNvPr id="120" name="Google Shape;120;p3:notes">
+            <a:extLst>
+              <a:ext uri="{FF2B5EF4-FFF2-40B4-BE49-F238E27FC236}">
+                <a16:creationId xmlns:a16="http://schemas.microsoft.com/office/drawing/2014/main" id="{E47D3514-A707-F3CB-3F3B-5080FDBA9DB9}"/>
+              </a:ext>
+            </a:extLst>
+          </p:cNvPr>
+          <p:cNvSpPr txBox="1">
+            <a:spLocks noGrp="1"/>
+          </p:cNvSpPr>
+          <p:nvPr>
+            <p:ph type="body" idx="1"/>
+          </p:nvPr>
+        </p:nvSpPr>
+        <p:spPr>
+          <a:xfrm>
+            <a:off x="685800" y="4343400"/>
+            <a:ext cx="5486400" cy="4114800"/>
+          </a:xfrm>
+          <a:prstGeom prst="rect">
+            <a:avLst/>
+          </a:prstGeom>
+        </p:spPr>
+        <p:txBody>
+          <a:bodyPr spcFirstLastPara="1" wrap="square" lIns="91425" tIns="91425" rIns="91425" bIns="91425" anchor="t" anchorCtr="0">
+            <a:noAutofit/>
+          </a:bodyPr>
+          <a:lstStyle/>
+          <a:p>
+            <a:pPr marL="0" lvl="0" indent="0" algn="l" rtl="0">
+              <a:spcBef>
+                <a:spcPts val="0"/>
+              </a:spcBef>
+              <a:spcAft>
+                <a:spcPts val="0"/>
+              </a:spcAft>
+              <a:buNone/>
+            </a:pPr>
+            <a:endParaRPr/>
+          </a:p>
+        </p:txBody>
+      </p:sp>
+      <p:sp>
+        <p:nvSpPr>
+          <p:cNvPr id="121" name="Google Shape;121;p3:notes">
+            <a:extLst>
+              <a:ext uri="{FF2B5EF4-FFF2-40B4-BE49-F238E27FC236}">
+                <a16:creationId xmlns:a16="http://schemas.microsoft.com/office/drawing/2014/main" id="{35F989B0-D5B6-DEE7-DF20-35F9A5221BE3}"/>
+              </a:ext>
+            </a:extLst>
+          </p:cNvPr>
+          <p:cNvSpPr>
+            <a:spLocks noGrp="1" noRot="1" noChangeAspect="1"/>
+          </p:cNvSpPr>
+          <p:nvPr>
+            <p:ph type="sldImg" idx="2"/>
+          </p:nvPr>
+        </p:nvSpPr>
+        <p:spPr>
+          <a:xfrm>
+            <a:off x="381000" y="685800"/>
+            <a:ext cx="6096000" cy="3429000"/>
+          </a:xfrm>
+          <a:custGeom>
+            <a:avLst/>
+            <a:gdLst/>
+            <a:ahLst/>
+            <a:cxnLst/>
+            <a:rect l="l" t="t" r="r" b="b"/>
+            <a:pathLst>
+              <a:path w="120000" h="120000" extrusionOk="0">
+                <a:moveTo>
+                  <a:pt x="0" y="0"/>
+                </a:moveTo>
+                <a:lnTo>
+                  <a:pt x="120000" y="0"/>
+                </a:lnTo>
+                <a:lnTo>
+                  <a:pt x="120000" y="120000"/>
+                </a:lnTo>
+                <a:lnTo>
+                  <a:pt x="0" y="120000"/>
+                </a:lnTo>
+                <a:close/>
+              </a:path>
+            </a:pathLst>
+          </a:custGeom>
+        </p:spPr>
+        <p:txBody>
+          <a:bodyPr/>
+          <a:lstStyle/>
+          <a:p>
+            <a:endParaRPr lang="LID4096"/>
+          </a:p>
+        </p:txBody>
+      </p:sp>
+    </p:spTree>
+    <p:extLst>
+      <p:ext uri="{BB962C8B-B14F-4D97-AF65-F5344CB8AC3E}">
+        <p14:creationId xmlns:p14="http://schemas.microsoft.com/office/powerpoint/2010/main" val="880960181"/>
+      </p:ext>
+    </p:extLst>
+  </p:cSld>
+  <p:clrMapOvr>
+    <a:masterClrMapping/>
+  </p:clrMapOvr>
+</p:notes>
+</file>
+
+<file path=ppt/notesSlides/notesSlide7.xml><?xml version="1.0" encoding="utf-8"?>
+<p:notes xmlns:a="http://schemas.openxmlformats.org/drawingml/2006/main" xmlns:r="http://schemas.openxmlformats.org/officeDocument/2006/relationships" xmlns:p="http://schemas.openxmlformats.org/presentationml/2006/main" showMasterSp="0" showMasterPhAnim="0">
+  <p:cSld>
+    <p:spTree>
+      <p:nvGrpSpPr>
+        <p:cNvPr id="1" name="Shape 119">
+          <a:extLst>
+            <a:ext uri="{FF2B5EF4-FFF2-40B4-BE49-F238E27FC236}">
+              <a16:creationId xmlns:a16="http://schemas.microsoft.com/office/drawing/2014/main" id="{2E5E52ED-B292-98A3-9EF7-091FF91828E3}"/>
+            </a:ext>
+          </a:extLst>
+        </p:cNvPr>
+        <p:cNvGrpSpPr/>
+        <p:nvPr/>
+      </p:nvGrpSpPr>
+      <p:grpSpPr>
+        <a:xfrm>
+          <a:off x="0" y="0"/>
+          <a:ext cx="0" cy="0"/>
+          <a:chOff x="0" y="0"/>
+          <a:chExt cx="0" cy="0"/>
+        </a:xfrm>
+      </p:grpSpPr>
+      <p:sp>
+        <p:nvSpPr>
+          <p:cNvPr id="120" name="Google Shape;120;p3:notes">
+            <a:extLst>
+              <a:ext uri="{FF2B5EF4-FFF2-40B4-BE49-F238E27FC236}">
+                <a16:creationId xmlns:a16="http://schemas.microsoft.com/office/drawing/2014/main" id="{042BFBBD-7FD2-C1DA-F26A-C284F515A5A7}"/>
+              </a:ext>
+            </a:extLst>
+          </p:cNvPr>
+          <p:cNvSpPr txBox="1">
+            <a:spLocks noGrp="1"/>
+          </p:cNvSpPr>
+          <p:nvPr>
+            <p:ph type="body" idx="1"/>
+          </p:nvPr>
+        </p:nvSpPr>
+        <p:spPr>
+          <a:xfrm>
+            <a:off x="685800" y="4343400"/>
+            <a:ext cx="5486400" cy="4114800"/>
+          </a:xfrm>
+          <a:prstGeom prst="rect">
+            <a:avLst/>
+          </a:prstGeom>
+        </p:spPr>
+        <p:txBody>
+          <a:bodyPr spcFirstLastPara="1" wrap="square" lIns="91425" tIns="91425" rIns="91425" bIns="91425" anchor="t" anchorCtr="0">
+            <a:noAutofit/>
+          </a:bodyPr>
+          <a:lstStyle/>
+          <a:p>
+            <a:pPr marL="0" lvl="0" indent="0" algn="l" rtl="0">
+              <a:spcBef>
+                <a:spcPts val="0"/>
+              </a:spcBef>
+              <a:spcAft>
+                <a:spcPts val="0"/>
+              </a:spcAft>
+              <a:buNone/>
+            </a:pPr>
+            <a:endParaRPr/>
+          </a:p>
+        </p:txBody>
+      </p:sp>
+      <p:sp>
+        <p:nvSpPr>
+          <p:cNvPr id="121" name="Google Shape;121;p3:notes">
+            <a:extLst>
+              <a:ext uri="{FF2B5EF4-FFF2-40B4-BE49-F238E27FC236}">
+                <a16:creationId xmlns:a16="http://schemas.microsoft.com/office/drawing/2014/main" id="{FBD53C8A-DA3A-5CBD-EA87-F6A38CE90B96}"/>
+              </a:ext>
+            </a:extLst>
+          </p:cNvPr>
+          <p:cNvSpPr>
+            <a:spLocks noGrp="1" noRot="1" noChangeAspect="1"/>
+          </p:cNvSpPr>
+          <p:nvPr>
+            <p:ph type="sldImg" idx="2"/>
+          </p:nvPr>
+        </p:nvSpPr>
+        <p:spPr>
+          <a:xfrm>
+            <a:off x="381000" y="685800"/>
+            <a:ext cx="6096000" cy="3429000"/>
+          </a:xfrm>
+          <a:custGeom>
+            <a:avLst/>
+            <a:gdLst/>
+            <a:ahLst/>
+            <a:cxnLst/>
+            <a:rect l="l" t="t" r="r" b="b"/>
+            <a:pathLst>
+              <a:path w="120000" h="120000" extrusionOk="0">
+                <a:moveTo>
+                  <a:pt x="0" y="0"/>
+                </a:moveTo>
+                <a:lnTo>
+                  <a:pt x="120000" y="0"/>
+                </a:lnTo>
+                <a:lnTo>
+                  <a:pt x="120000" y="120000"/>
+                </a:lnTo>
+                <a:lnTo>
+                  <a:pt x="0" y="120000"/>
+                </a:lnTo>
+                <a:close/>
+              </a:path>
+            </a:pathLst>
+          </a:custGeom>
+        </p:spPr>
+        <p:txBody>
+          <a:bodyPr/>
+          <a:lstStyle/>
+          <a:p>
+            <a:endParaRPr lang="LID4096"/>
+          </a:p>
+        </p:txBody>
+      </p:sp>
+    </p:spTree>
+    <p:extLst>
+      <p:ext uri="{BB962C8B-B14F-4D97-AF65-F5344CB8AC3E}">
+        <p14:creationId xmlns:p14="http://schemas.microsoft.com/office/powerpoint/2010/main" val="4012124846"/>
+      </p:ext>
+    </p:extLst>
+  </p:cSld>
+  <p:clrMapOvr>
+    <a:masterClrMapping/>
+  </p:clrMapOvr>
+</p:notes>
+</file>
+
+<file path=ppt/notesSlides/notesSlide8.xml><?xml version="1.0" encoding="utf-8"?>
+<p:notes xmlns:a="http://schemas.openxmlformats.org/drawingml/2006/main" xmlns:r="http://schemas.openxmlformats.org/officeDocument/2006/relationships" xmlns:p="http://schemas.openxmlformats.org/presentationml/2006/main" showMasterSp="0" showMasterPhAnim="0">
+  <p:cSld>
+    <p:spTree>
+      <p:nvGrpSpPr>
+        <p:cNvPr id="1" name="Shape 119">
+          <a:extLst>
+            <a:ext uri="{FF2B5EF4-FFF2-40B4-BE49-F238E27FC236}">
+              <a16:creationId xmlns:a16="http://schemas.microsoft.com/office/drawing/2014/main" id="{BA42E62A-0527-F6AB-A829-0797F0280746}"/>
+            </a:ext>
+          </a:extLst>
+        </p:cNvPr>
+        <p:cNvGrpSpPr/>
+        <p:nvPr/>
+      </p:nvGrpSpPr>
+      <p:grpSpPr>
+        <a:xfrm>
+          <a:off x="0" y="0"/>
+          <a:ext cx="0" cy="0"/>
+          <a:chOff x="0" y="0"/>
+          <a:chExt cx="0" cy="0"/>
+        </a:xfrm>
+      </p:grpSpPr>
+      <p:sp>
+        <p:nvSpPr>
+          <p:cNvPr id="120" name="Google Shape;120;p3:notes">
+            <a:extLst>
+              <a:ext uri="{FF2B5EF4-FFF2-40B4-BE49-F238E27FC236}">
+                <a16:creationId xmlns:a16="http://schemas.microsoft.com/office/drawing/2014/main" id="{74B08977-B368-DBD6-4ABB-A9CB5982BC14}"/>
+              </a:ext>
+            </a:extLst>
+          </p:cNvPr>
+          <p:cNvSpPr txBox="1">
+            <a:spLocks noGrp="1"/>
+          </p:cNvSpPr>
+          <p:nvPr>
+            <p:ph type="body" idx="1"/>
+          </p:nvPr>
+        </p:nvSpPr>
+        <p:spPr>
+          <a:xfrm>
+            <a:off x="685800" y="4343400"/>
+            <a:ext cx="5486400" cy="4114800"/>
+          </a:xfrm>
+          <a:prstGeom prst="rect">
+            <a:avLst/>
+          </a:prstGeom>
+        </p:spPr>
+        <p:txBody>
+          <a:bodyPr spcFirstLastPara="1" wrap="square" lIns="91425" tIns="91425" rIns="91425" bIns="91425" anchor="t" anchorCtr="0">
+            <a:noAutofit/>
+          </a:bodyPr>
+          <a:lstStyle/>
+          <a:p>
+            <a:pPr marL="0" lvl="0" indent="0" algn="l" rtl="0">
+              <a:spcBef>
+                <a:spcPts val="0"/>
+              </a:spcBef>
+              <a:spcAft>
+                <a:spcPts val="0"/>
+              </a:spcAft>
+              <a:buNone/>
+            </a:pPr>
+            <a:endParaRPr/>
+          </a:p>
+        </p:txBody>
+      </p:sp>
+      <p:sp>
+        <p:nvSpPr>
+          <p:cNvPr id="121" name="Google Shape;121;p3:notes">
+            <a:extLst>
+              <a:ext uri="{FF2B5EF4-FFF2-40B4-BE49-F238E27FC236}">
+                <a16:creationId xmlns:a16="http://schemas.microsoft.com/office/drawing/2014/main" id="{BCD89377-55AE-D5EE-1D34-3283AC732B73}"/>
+              </a:ext>
+            </a:extLst>
+          </p:cNvPr>
+          <p:cNvSpPr>
+            <a:spLocks noGrp="1" noRot="1" noChangeAspect="1"/>
+          </p:cNvSpPr>
+          <p:nvPr>
+            <p:ph type="sldImg" idx="2"/>
+          </p:nvPr>
+        </p:nvSpPr>
+        <p:spPr>
+          <a:xfrm>
+            <a:off x="381000" y="685800"/>
+            <a:ext cx="6096000" cy="3429000"/>
+          </a:xfrm>
+          <a:custGeom>
+            <a:avLst/>
+            <a:gdLst/>
+            <a:ahLst/>
+            <a:cxnLst/>
+            <a:rect l="l" t="t" r="r" b="b"/>
+            <a:pathLst>
+              <a:path w="120000" h="120000" extrusionOk="0">
+                <a:moveTo>
+                  <a:pt x="0" y="0"/>
+                </a:moveTo>
+                <a:lnTo>
+                  <a:pt x="120000" y="0"/>
+                </a:lnTo>
+                <a:lnTo>
+                  <a:pt x="120000" y="120000"/>
+                </a:lnTo>
+                <a:lnTo>
+                  <a:pt x="0" y="120000"/>
+                </a:lnTo>
+                <a:close/>
+              </a:path>
+            </a:pathLst>
+          </a:custGeom>
+        </p:spPr>
+        <p:txBody>
+          <a:bodyPr/>
+          <a:lstStyle/>
+          <a:p>
+            <a:endParaRPr lang="LID4096"/>
+          </a:p>
+        </p:txBody>
+      </p:sp>
+    </p:spTree>
+    <p:extLst>
+      <p:ext uri="{BB962C8B-B14F-4D97-AF65-F5344CB8AC3E}">
+        <p14:creationId xmlns:p14="http://schemas.microsoft.com/office/powerpoint/2010/main" val="346894642"/>
+      </p:ext>
+    </p:extLst>
+  </p:cSld>
+  <p:clrMapOvr>
+    <a:masterClrMapping/>
+  </p:clrMapOvr>
+</p:notes>
+</file>
+
+<file path=ppt/notesSlides/notesSlide9.xml><?xml version="1.0" encoding="utf-8"?>
+<p:notes xmlns:a="http://schemas.openxmlformats.org/drawingml/2006/main" xmlns:r="http://schemas.openxmlformats.org/officeDocument/2006/relationships" xmlns:p="http://schemas.openxmlformats.org/presentationml/2006/main" showMasterSp="0" showMasterPhAnim="0">
+  <p:cSld>
+    <p:spTree>
+      <p:nvGrpSpPr>
+        <p:cNvPr id="1" name="Shape 119">
+          <a:extLst>
+            <a:ext uri="{FF2B5EF4-FFF2-40B4-BE49-F238E27FC236}">
               <a16:creationId xmlns:a16="http://schemas.microsoft.com/office/drawing/2014/main" id="{D7718B6B-D2A3-C9BB-BEE6-0877CBA98EA1}"/>
             </a:ext>
           </a:extLst>
@@ -1375,274 +2183,6 @@
     <p:extLst>
       <p:ext uri="{BB962C8B-B14F-4D97-AF65-F5344CB8AC3E}">
         <p14:creationId xmlns:p14="http://schemas.microsoft.com/office/powerpoint/2010/main" val="2501075336"/>
-      </p:ext>
-    </p:extLst>
-  </p:cSld>
-  <p:clrMapOvr>
-    <a:masterClrMapping/>
-  </p:clrMapOvr>
-</p:notes>
-</file>
-
-<file path=ppt/notesSlides/notesSlide6.xml><?xml version="1.0" encoding="utf-8"?>
-<p:notes xmlns:a="http://schemas.openxmlformats.org/drawingml/2006/main" xmlns:r="http://schemas.openxmlformats.org/officeDocument/2006/relationships" xmlns:p="http://schemas.openxmlformats.org/presentationml/2006/main" showMasterSp="0" showMasterPhAnim="0">
-  <p:cSld>
-    <p:spTree>
-      <p:nvGrpSpPr>
-        <p:cNvPr id="1" name="Shape 80">
-          <a:extLst>
-            <a:ext uri="{FF2B5EF4-FFF2-40B4-BE49-F238E27FC236}">
-              <a16:creationId xmlns:a16="http://schemas.microsoft.com/office/drawing/2014/main" id="{9084205C-3E22-B54C-96B3-DF28C8D8C443}"/>
-            </a:ext>
-          </a:extLst>
-        </p:cNvPr>
-        <p:cNvGrpSpPr/>
-        <p:nvPr/>
-      </p:nvGrpSpPr>
-      <p:grpSpPr>
-        <a:xfrm>
-          <a:off x="0" y="0"/>
-          <a:ext cx="0" cy="0"/>
-          <a:chOff x="0" y="0"/>
-          <a:chExt cx="0" cy="0"/>
-        </a:xfrm>
-      </p:grpSpPr>
-      <p:sp>
-        <p:nvSpPr>
-          <p:cNvPr id="81" name="Google Shape;81;p1:notes">
-            <a:extLst>
-              <a:ext uri="{FF2B5EF4-FFF2-40B4-BE49-F238E27FC236}">
-                <a16:creationId xmlns:a16="http://schemas.microsoft.com/office/drawing/2014/main" id="{1050EB1E-2A3B-64B4-591B-EF52066A0B0F}"/>
-              </a:ext>
-            </a:extLst>
-          </p:cNvPr>
-          <p:cNvSpPr txBox="1">
-            <a:spLocks noGrp="1"/>
-          </p:cNvSpPr>
-          <p:nvPr>
-            <p:ph type="body" idx="1"/>
-          </p:nvPr>
-        </p:nvSpPr>
-        <p:spPr>
-          <a:xfrm>
-            <a:off x="685800" y="4343400"/>
-            <a:ext cx="5486400" cy="4114800"/>
-          </a:xfrm>
-          <a:prstGeom prst="rect">
-            <a:avLst/>
-          </a:prstGeom>
-        </p:spPr>
-        <p:txBody>
-          <a:bodyPr spcFirstLastPara="1" wrap="square" lIns="91425" tIns="91425" rIns="91425" bIns="91425" anchor="t" anchorCtr="0">
-            <a:noAutofit/>
-          </a:bodyPr>
-          <a:lstStyle/>
-          <a:p>
-            <a:pPr marL="0" lvl="0" indent="0" algn="l" rtl="0">
-              <a:spcBef>
-                <a:spcPts val="0"/>
-              </a:spcBef>
-              <a:spcAft>
-                <a:spcPts val="0"/>
-              </a:spcAft>
-              <a:buNone/>
-            </a:pPr>
-            <a:endParaRPr/>
-          </a:p>
-        </p:txBody>
-      </p:sp>
-      <p:sp>
-        <p:nvSpPr>
-          <p:cNvPr id="82" name="Google Shape;82;p1:notes">
-            <a:extLst>
-              <a:ext uri="{FF2B5EF4-FFF2-40B4-BE49-F238E27FC236}">
-                <a16:creationId xmlns:a16="http://schemas.microsoft.com/office/drawing/2014/main" id="{61B75D58-FB54-3ECE-8EA5-3F2A10B56C6E}"/>
-              </a:ext>
-            </a:extLst>
-          </p:cNvPr>
-          <p:cNvSpPr>
-            <a:spLocks noGrp="1" noRot="1" noChangeAspect="1"/>
-          </p:cNvSpPr>
-          <p:nvPr>
-            <p:ph type="sldImg" idx="2"/>
-          </p:nvPr>
-        </p:nvSpPr>
-        <p:spPr>
-          <a:xfrm>
-            <a:off x="381000" y="685800"/>
-            <a:ext cx="6096000" cy="3429000"/>
-          </a:xfrm>
-          <a:custGeom>
-            <a:avLst/>
-            <a:gdLst/>
-            <a:ahLst/>
-            <a:cxnLst/>
-            <a:rect l="l" t="t" r="r" b="b"/>
-            <a:pathLst>
-              <a:path w="120000" h="120000" extrusionOk="0">
-                <a:moveTo>
-                  <a:pt x="0" y="0"/>
-                </a:moveTo>
-                <a:lnTo>
-                  <a:pt x="120000" y="0"/>
-                </a:lnTo>
-                <a:lnTo>
-                  <a:pt x="120000" y="120000"/>
-                </a:lnTo>
-                <a:lnTo>
-                  <a:pt x="0" y="120000"/>
-                </a:lnTo>
-                <a:close/>
-              </a:path>
-            </a:pathLst>
-          </a:custGeom>
-        </p:spPr>
-        <p:txBody>
-          <a:bodyPr/>
-          <a:lstStyle/>
-          <a:p>
-            <a:endParaRPr lang="LID4096"/>
-          </a:p>
-        </p:txBody>
-      </p:sp>
-    </p:spTree>
-    <p:extLst>
-      <p:ext uri="{BB962C8B-B14F-4D97-AF65-F5344CB8AC3E}">
-        <p14:creationId xmlns:p14="http://schemas.microsoft.com/office/powerpoint/2010/main" val="4273759065"/>
-      </p:ext>
-    </p:extLst>
-  </p:cSld>
-  <p:clrMapOvr>
-    <a:masterClrMapping/>
-  </p:clrMapOvr>
-</p:notes>
-</file>
-
-<file path=ppt/notesSlides/notesSlide7.xml><?xml version="1.0" encoding="utf-8"?>
-<p:notes xmlns:a="http://schemas.openxmlformats.org/drawingml/2006/main" xmlns:r="http://schemas.openxmlformats.org/officeDocument/2006/relationships" xmlns:p="http://schemas.openxmlformats.org/presentationml/2006/main" showMasterSp="0" showMasterPhAnim="0">
-  <p:cSld>
-    <p:spTree>
-      <p:nvGrpSpPr>
-        <p:cNvPr id="1" name="Shape 119">
-          <a:extLst>
-            <a:ext uri="{FF2B5EF4-FFF2-40B4-BE49-F238E27FC236}">
-              <a16:creationId xmlns:a16="http://schemas.microsoft.com/office/drawing/2014/main" id="{FAD83F17-DCFD-6745-448E-1259A404C504}"/>
-            </a:ext>
-          </a:extLst>
-        </p:cNvPr>
-        <p:cNvGrpSpPr/>
-        <p:nvPr/>
-      </p:nvGrpSpPr>
-      <p:grpSpPr>
-        <a:xfrm>
-          <a:off x="0" y="0"/>
-          <a:ext cx="0" cy="0"/>
-          <a:chOff x="0" y="0"/>
-          <a:chExt cx="0" cy="0"/>
-        </a:xfrm>
-      </p:grpSpPr>
-      <p:sp>
-        <p:nvSpPr>
-          <p:cNvPr id="120" name="Google Shape;120;p3:notes">
-            <a:extLst>
-              <a:ext uri="{FF2B5EF4-FFF2-40B4-BE49-F238E27FC236}">
-                <a16:creationId xmlns:a16="http://schemas.microsoft.com/office/drawing/2014/main" id="{128B49B5-4DC8-B1CD-B002-2E023B1AFF7D}"/>
-              </a:ext>
-            </a:extLst>
-          </p:cNvPr>
-          <p:cNvSpPr txBox="1">
-            <a:spLocks noGrp="1"/>
-          </p:cNvSpPr>
-          <p:nvPr>
-            <p:ph type="body" idx="1"/>
-          </p:nvPr>
-        </p:nvSpPr>
-        <p:spPr>
-          <a:xfrm>
-            <a:off x="685800" y="4343400"/>
-            <a:ext cx="5486400" cy="4114800"/>
-          </a:xfrm>
-          <a:prstGeom prst="rect">
-            <a:avLst/>
-          </a:prstGeom>
-        </p:spPr>
-        <p:txBody>
-          <a:bodyPr spcFirstLastPara="1" wrap="square" lIns="91425" tIns="91425" rIns="91425" bIns="91425" anchor="t" anchorCtr="0">
-            <a:noAutofit/>
-          </a:bodyPr>
-          <a:lstStyle/>
-          <a:p>
-            <a:pPr marL="0" lvl="0" indent="0" algn="l" rtl="0">
-              <a:spcBef>
-                <a:spcPts val="0"/>
-              </a:spcBef>
-              <a:spcAft>
-                <a:spcPts val="0"/>
-              </a:spcAft>
-              <a:buNone/>
-            </a:pPr>
-            <a:endParaRPr/>
-          </a:p>
-        </p:txBody>
-      </p:sp>
-      <p:sp>
-        <p:nvSpPr>
-          <p:cNvPr id="121" name="Google Shape;121;p3:notes">
-            <a:extLst>
-              <a:ext uri="{FF2B5EF4-FFF2-40B4-BE49-F238E27FC236}">
-                <a16:creationId xmlns:a16="http://schemas.microsoft.com/office/drawing/2014/main" id="{0C423171-0A09-B9DB-FA4C-BCDFF075D0C8}"/>
-              </a:ext>
-            </a:extLst>
-          </p:cNvPr>
-          <p:cNvSpPr>
-            <a:spLocks noGrp="1" noRot="1" noChangeAspect="1"/>
-          </p:cNvSpPr>
-          <p:nvPr>
-            <p:ph type="sldImg" idx="2"/>
-          </p:nvPr>
-        </p:nvSpPr>
-        <p:spPr>
-          <a:xfrm>
-            <a:off x="381000" y="685800"/>
-            <a:ext cx="6096000" cy="3429000"/>
-          </a:xfrm>
-          <a:custGeom>
-            <a:avLst/>
-            <a:gdLst/>
-            <a:ahLst/>
-            <a:cxnLst/>
-            <a:rect l="l" t="t" r="r" b="b"/>
-            <a:pathLst>
-              <a:path w="120000" h="120000" extrusionOk="0">
-                <a:moveTo>
-                  <a:pt x="0" y="0"/>
-                </a:moveTo>
-                <a:lnTo>
-                  <a:pt x="120000" y="0"/>
-                </a:lnTo>
-                <a:lnTo>
-                  <a:pt x="120000" y="120000"/>
-                </a:lnTo>
-                <a:lnTo>
-                  <a:pt x="0" y="120000"/>
-                </a:lnTo>
-                <a:close/>
-              </a:path>
-            </a:pathLst>
-          </a:custGeom>
-        </p:spPr>
-        <p:txBody>
-          <a:bodyPr/>
-          <a:lstStyle/>
-          <a:p>
-            <a:endParaRPr lang="LID4096"/>
-          </a:p>
-        </p:txBody>
-      </p:sp>
-    </p:spTree>
-    <p:extLst>
-      <p:ext uri="{BB962C8B-B14F-4D97-AF65-F5344CB8AC3E}">
-        <p14:creationId xmlns:p14="http://schemas.microsoft.com/office/powerpoint/2010/main" val="4264504045"/>
       </p:ext>
     </p:extLst>
   </p:cSld>
@@ -2054,740 +2594,6 @@
 </file>
 
 <file path=ppt/slideLayouts/slideLayout2.xml><?xml version="1.0" encoding="utf-8"?>
-<p:sldLayout xmlns:a="http://schemas.openxmlformats.org/drawingml/2006/main" xmlns:r="http://schemas.openxmlformats.org/officeDocument/2006/relationships" xmlns:p="http://schemas.openxmlformats.org/presentationml/2006/main" matchingName="Section Header" type="secHead">
-  <p:cSld name="SECTION_HEADER">
-    <p:spTree>
-      <p:nvGrpSpPr>
-        <p:cNvPr id="1" name="Shape 27"/>
-        <p:cNvGrpSpPr/>
-        <p:nvPr/>
-      </p:nvGrpSpPr>
-      <p:grpSpPr>
-        <a:xfrm>
-          <a:off x="0" y="0"/>
-          <a:ext cx="0" cy="0"/>
-          <a:chOff x="0" y="0"/>
-          <a:chExt cx="0" cy="0"/>
-        </a:xfrm>
-      </p:grpSpPr>
-      <p:sp>
-        <p:nvSpPr>
-          <p:cNvPr id="28" name="Google Shape;28;p5"/>
-          <p:cNvSpPr txBox="1">
-            <a:spLocks noGrp="1"/>
-          </p:cNvSpPr>
-          <p:nvPr>
-            <p:ph type="title"/>
-          </p:nvPr>
-        </p:nvSpPr>
-        <p:spPr>
-          <a:xfrm>
-            <a:off x="722313" y="4406900"/>
-            <a:ext cx="7772400" cy="1362075"/>
-          </a:xfrm>
-          <a:prstGeom prst="rect">
-            <a:avLst/>
-          </a:prstGeom>
-          <a:noFill/>
-          <a:ln>
-            <a:noFill/>
-          </a:ln>
-        </p:spPr>
-        <p:txBody>
-          <a:bodyPr spcFirstLastPara="1" wrap="square" lIns="91425" tIns="45700" rIns="91425" bIns="45700" anchor="t" anchorCtr="0">
-            <a:normAutofit/>
-          </a:bodyPr>
-          <a:lstStyle>
-            <a:lvl1pPr lvl="0" algn="l">
-              <a:spcBef>
-                <a:spcPts val="0"/>
-              </a:spcBef>
-              <a:spcAft>
-                <a:spcPts val="0"/>
-              </a:spcAft>
-              <a:buClr>
-                <a:schemeClr val="dk1"/>
-              </a:buClr>
-              <a:buSzPts val="4000"/>
-              <a:buFont typeface="Calibri"/>
-              <a:buNone/>
-              <a:defRPr sz="4000" b="1" cap="none"/>
-            </a:lvl1pPr>
-            <a:lvl2pPr lvl="1">
-              <a:spcBef>
-                <a:spcPts val="0"/>
-              </a:spcBef>
-              <a:spcAft>
-                <a:spcPts val="0"/>
-              </a:spcAft>
-              <a:buSzPts val="1400"/>
-              <a:buNone/>
-              <a:defRPr/>
-            </a:lvl2pPr>
-            <a:lvl3pPr lvl="2">
-              <a:spcBef>
-                <a:spcPts val="0"/>
-              </a:spcBef>
-              <a:spcAft>
-                <a:spcPts val="0"/>
-              </a:spcAft>
-              <a:buSzPts val="1400"/>
-              <a:buNone/>
-              <a:defRPr/>
-            </a:lvl3pPr>
-            <a:lvl4pPr lvl="3">
-              <a:spcBef>
-                <a:spcPts val="0"/>
-              </a:spcBef>
-              <a:spcAft>
-                <a:spcPts val="0"/>
-              </a:spcAft>
-              <a:buSzPts val="1400"/>
-              <a:buNone/>
-              <a:defRPr/>
-            </a:lvl4pPr>
-            <a:lvl5pPr lvl="4">
-              <a:spcBef>
-                <a:spcPts val="0"/>
-              </a:spcBef>
-              <a:spcAft>
-                <a:spcPts val="0"/>
-              </a:spcAft>
-              <a:buSzPts val="1400"/>
-              <a:buNone/>
-              <a:defRPr/>
-            </a:lvl5pPr>
-            <a:lvl6pPr lvl="5">
-              <a:spcBef>
-                <a:spcPts val="0"/>
-              </a:spcBef>
-              <a:spcAft>
-                <a:spcPts val="0"/>
-              </a:spcAft>
-              <a:buSzPts val="1400"/>
-              <a:buNone/>
-              <a:defRPr/>
-            </a:lvl6pPr>
-            <a:lvl7pPr lvl="6">
-              <a:spcBef>
-                <a:spcPts val="0"/>
-              </a:spcBef>
-              <a:spcAft>
-                <a:spcPts val="0"/>
-              </a:spcAft>
-              <a:buSzPts val="1400"/>
-              <a:buNone/>
-              <a:defRPr/>
-            </a:lvl7pPr>
-            <a:lvl8pPr lvl="7">
-              <a:spcBef>
-                <a:spcPts val="0"/>
-              </a:spcBef>
-              <a:spcAft>
-                <a:spcPts val="0"/>
-              </a:spcAft>
-              <a:buSzPts val="1400"/>
-              <a:buNone/>
-              <a:defRPr/>
-            </a:lvl8pPr>
-            <a:lvl9pPr lvl="8">
-              <a:spcBef>
-                <a:spcPts val="0"/>
-              </a:spcBef>
-              <a:spcAft>
-                <a:spcPts val="0"/>
-              </a:spcAft>
-              <a:buSzPts val="1400"/>
-              <a:buNone/>
-              <a:defRPr/>
-            </a:lvl9pPr>
-          </a:lstStyle>
-          <a:p>
-            <a:endParaRPr/>
-          </a:p>
-        </p:txBody>
-      </p:sp>
-      <p:sp>
-        <p:nvSpPr>
-          <p:cNvPr id="29" name="Google Shape;29;p5"/>
-          <p:cNvSpPr txBox="1">
-            <a:spLocks noGrp="1"/>
-          </p:cNvSpPr>
-          <p:nvPr>
-            <p:ph type="body" idx="1"/>
-          </p:nvPr>
-        </p:nvSpPr>
-        <p:spPr>
-          <a:xfrm>
-            <a:off x="722313" y="2906713"/>
-            <a:ext cx="7772400" cy="1500187"/>
-          </a:xfrm>
-          <a:prstGeom prst="rect">
-            <a:avLst/>
-          </a:prstGeom>
-          <a:noFill/>
-          <a:ln>
-            <a:noFill/>
-          </a:ln>
-        </p:spPr>
-        <p:txBody>
-          <a:bodyPr spcFirstLastPara="1" wrap="square" lIns="91425" tIns="45700" rIns="91425" bIns="45700" anchor="b" anchorCtr="0">
-            <a:normAutofit/>
-          </a:bodyPr>
-          <a:lstStyle>
-            <a:lvl1pPr marL="457200" lvl="0" indent="-228600" algn="l">
-              <a:spcBef>
-                <a:spcPts val="400"/>
-              </a:spcBef>
-              <a:spcAft>
-                <a:spcPts val="0"/>
-              </a:spcAft>
-              <a:buClr>
-                <a:srgbClr val="888888"/>
-              </a:buClr>
-              <a:buSzPts val="2000"/>
-              <a:buNone/>
-              <a:defRPr sz="2000">
-                <a:solidFill>
-                  <a:srgbClr val="888888"/>
-                </a:solidFill>
-              </a:defRPr>
-            </a:lvl1pPr>
-            <a:lvl2pPr marL="914400" lvl="1" indent="-228600" algn="l">
-              <a:spcBef>
-                <a:spcPts val="360"/>
-              </a:spcBef>
-              <a:spcAft>
-                <a:spcPts val="0"/>
-              </a:spcAft>
-              <a:buClr>
-                <a:srgbClr val="888888"/>
-              </a:buClr>
-              <a:buSzPts val="1800"/>
-              <a:buNone/>
-              <a:defRPr sz="1800">
-                <a:solidFill>
-                  <a:srgbClr val="888888"/>
-                </a:solidFill>
-              </a:defRPr>
-            </a:lvl2pPr>
-            <a:lvl3pPr marL="1371600" lvl="2" indent="-228600" algn="l">
-              <a:spcBef>
-                <a:spcPts val="320"/>
-              </a:spcBef>
-              <a:spcAft>
-                <a:spcPts val="0"/>
-              </a:spcAft>
-              <a:buClr>
-                <a:srgbClr val="888888"/>
-              </a:buClr>
-              <a:buSzPts val="1600"/>
-              <a:buNone/>
-              <a:defRPr sz="1600">
-                <a:solidFill>
-                  <a:srgbClr val="888888"/>
-                </a:solidFill>
-              </a:defRPr>
-            </a:lvl3pPr>
-            <a:lvl4pPr marL="1828800" lvl="3" indent="-228600" algn="l">
-              <a:spcBef>
-                <a:spcPts val="280"/>
-              </a:spcBef>
-              <a:spcAft>
-                <a:spcPts val="0"/>
-              </a:spcAft>
-              <a:buClr>
-                <a:srgbClr val="888888"/>
-              </a:buClr>
-              <a:buSzPts val="1400"/>
-              <a:buNone/>
-              <a:defRPr sz="1400">
-                <a:solidFill>
-                  <a:srgbClr val="888888"/>
-                </a:solidFill>
-              </a:defRPr>
-            </a:lvl4pPr>
-            <a:lvl5pPr marL="2286000" lvl="4" indent="-228600" algn="l">
-              <a:spcBef>
-                <a:spcPts val="280"/>
-              </a:spcBef>
-              <a:spcAft>
-                <a:spcPts val="0"/>
-              </a:spcAft>
-              <a:buClr>
-                <a:srgbClr val="888888"/>
-              </a:buClr>
-              <a:buSzPts val="1400"/>
-              <a:buNone/>
-              <a:defRPr sz="1400">
-                <a:solidFill>
-                  <a:srgbClr val="888888"/>
-                </a:solidFill>
-              </a:defRPr>
-            </a:lvl5pPr>
-            <a:lvl6pPr marL="2743200" lvl="5" indent="-228600" algn="l">
-              <a:spcBef>
-                <a:spcPts val="280"/>
-              </a:spcBef>
-              <a:spcAft>
-                <a:spcPts val="0"/>
-              </a:spcAft>
-              <a:buClr>
-                <a:srgbClr val="888888"/>
-              </a:buClr>
-              <a:buSzPts val="1400"/>
-              <a:buNone/>
-              <a:defRPr sz="1400">
-                <a:solidFill>
-                  <a:srgbClr val="888888"/>
-                </a:solidFill>
-              </a:defRPr>
-            </a:lvl6pPr>
-            <a:lvl7pPr marL="3200400" lvl="6" indent="-228600" algn="l">
-              <a:spcBef>
-                <a:spcPts val="280"/>
-              </a:spcBef>
-              <a:spcAft>
-                <a:spcPts val="0"/>
-              </a:spcAft>
-              <a:buClr>
-                <a:srgbClr val="888888"/>
-              </a:buClr>
-              <a:buSzPts val="1400"/>
-              <a:buNone/>
-              <a:defRPr sz="1400">
-                <a:solidFill>
-                  <a:srgbClr val="888888"/>
-                </a:solidFill>
-              </a:defRPr>
-            </a:lvl7pPr>
-            <a:lvl8pPr marL="3657600" lvl="7" indent="-228600" algn="l">
-              <a:spcBef>
-                <a:spcPts val="280"/>
-              </a:spcBef>
-              <a:spcAft>
-                <a:spcPts val="0"/>
-              </a:spcAft>
-              <a:buClr>
-                <a:srgbClr val="888888"/>
-              </a:buClr>
-              <a:buSzPts val="1400"/>
-              <a:buNone/>
-              <a:defRPr sz="1400">
-                <a:solidFill>
-                  <a:srgbClr val="888888"/>
-                </a:solidFill>
-              </a:defRPr>
-            </a:lvl8pPr>
-            <a:lvl9pPr marL="4114800" lvl="8" indent="-228600" algn="l">
-              <a:spcBef>
-                <a:spcPts val="280"/>
-              </a:spcBef>
-              <a:spcAft>
-                <a:spcPts val="0"/>
-              </a:spcAft>
-              <a:buClr>
-                <a:srgbClr val="888888"/>
-              </a:buClr>
-              <a:buSzPts val="1400"/>
-              <a:buNone/>
-              <a:defRPr sz="1400">
-                <a:solidFill>
-                  <a:srgbClr val="888888"/>
-                </a:solidFill>
-              </a:defRPr>
-            </a:lvl9pPr>
-          </a:lstStyle>
-          <a:p>
-            <a:endParaRPr/>
-          </a:p>
-        </p:txBody>
-      </p:sp>
-      <p:sp>
-        <p:nvSpPr>
-          <p:cNvPr id="30" name="Google Shape;30;p5"/>
-          <p:cNvSpPr txBox="1">
-            <a:spLocks noGrp="1"/>
-          </p:cNvSpPr>
-          <p:nvPr>
-            <p:ph type="dt" idx="10"/>
-          </p:nvPr>
-        </p:nvSpPr>
-        <p:spPr>
-          <a:xfrm>
-            <a:off x="457200" y="6356350"/>
-            <a:ext cx="2133600" cy="365125"/>
-          </a:xfrm>
-          <a:prstGeom prst="rect">
-            <a:avLst/>
-          </a:prstGeom>
-          <a:noFill/>
-          <a:ln>
-            <a:noFill/>
-          </a:ln>
-        </p:spPr>
-        <p:txBody>
-          <a:bodyPr spcFirstLastPara="1" wrap="square" lIns="91425" tIns="45700" rIns="91425" bIns="45700" anchor="ctr" anchorCtr="0">
-            <a:noAutofit/>
-          </a:bodyPr>
-          <a:lstStyle>
-            <a:lvl1pPr lvl="0" algn="l">
-              <a:spcBef>
-                <a:spcPts val="0"/>
-              </a:spcBef>
-              <a:spcAft>
-                <a:spcPts val="0"/>
-              </a:spcAft>
-              <a:buSzPts val="1400"/>
-              <a:buNone/>
-              <a:defRPr/>
-            </a:lvl1pPr>
-            <a:lvl2pPr lvl="1" algn="l">
-              <a:spcBef>
-                <a:spcPts val="0"/>
-              </a:spcBef>
-              <a:spcAft>
-                <a:spcPts val="0"/>
-              </a:spcAft>
-              <a:buSzPts val="1400"/>
-              <a:buNone/>
-              <a:defRPr/>
-            </a:lvl2pPr>
-            <a:lvl3pPr lvl="2" algn="l">
-              <a:spcBef>
-                <a:spcPts val="0"/>
-              </a:spcBef>
-              <a:spcAft>
-                <a:spcPts val="0"/>
-              </a:spcAft>
-              <a:buSzPts val="1400"/>
-              <a:buNone/>
-              <a:defRPr/>
-            </a:lvl3pPr>
-            <a:lvl4pPr lvl="3" algn="l">
-              <a:spcBef>
-                <a:spcPts val="0"/>
-              </a:spcBef>
-              <a:spcAft>
-                <a:spcPts val="0"/>
-              </a:spcAft>
-              <a:buSzPts val="1400"/>
-              <a:buNone/>
-              <a:defRPr/>
-            </a:lvl4pPr>
-            <a:lvl5pPr lvl="4" algn="l">
-              <a:spcBef>
-                <a:spcPts val="0"/>
-              </a:spcBef>
-              <a:spcAft>
-                <a:spcPts val="0"/>
-              </a:spcAft>
-              <a:buSzPts val="1400"/>
-              <a:buNone/>
-              <a:defRPr/>
-            </a:lvl5pPr>
-            <a:lvl6pPr lvl="5" algn="l">
-              <a:spcBef>
-                <a:spcPts val="0"/>
-              </a:spcBef>
-              <a:spcAft>
-                <a:spcPts val="0"/>
-              </a:spcAft>
-              <a:buSzPts val="1400"/>
-              <a:buNone/>
-              <a:defRPr/>
-            </a:lvl6pPr>
-            <a:lvl7pPr lvl="6" algn="l">
-              <a:spcBef>
-                <a:spcPts val="0"/>
-              </a:spcBef>
-              <a:spcAft>
-                <a:spcPts val="0"/>
-              </a:spcAft>
-              <a:buSzPts val="1400"/>
-              <a:buNone/>
-              <a:defRPr/>
-            </a:lvl7pPr>
-            <a:lvl8pPr lvl="7" algn="l">
-              <a:spcBef>
-                <a:spcPts val="0"/>
-              </a:spcBef>
-              <a:spcAft>
-                <a:spcPts val="0"/>
-              </a:spcAft>
-              <a:buSzPts val="1400"/>
-              <a:buNone/>
-              <a:defRPr/>
-            </a:lvl8pPr>
-            <a:lvl9pPr lvl="8" algn="l">
-              <a:spcBef>
-                <a:spcPts val="0"/>
-              </a:spcBef>
-              <a:spcAft>
-                <a:spcPts val="0"/>
-              </a:spcAft>
-              <a:buSzPts val="1400"/>
-              <a:buNone/>
-              <a:defRPr/>
-            </a:lvl9pPr>
-          </a:lstStyle>
-          <a:p>
-            <a:endParaRPr/>
-          </a:p>
-        </p:txBody>
-      </p:sp>
-      <p:sp>
-        <p:nvSpPr>
-          <p:cNvPr id="31" name="Google Shape;31;p5"/>
-          <p:cNvSpPr txBox="1">
-            <a:spLocks noGrp="1"/>
-          </p:cNvSpPr>
-          <p:nvPr>
-            <p:ph type="ftr" idx="11"/>
-          </p:nvPr>
-        </p:nvSpPr>
-        <p:spPr>
-          <a:xfrm>
-            <a:off x="3124200" y="6356350"/>
-            <a:ext cx="2895600" cy="365125"/>
-          </a:xfrm>
-          <a:prstGeom prst="rect">
-            <a:avLst/>
-          </a:prstGeom>
-          <a:noFill/>
-          <a:ln>
-            <a:noFill/>
-          </a:ln>
-        </p:spPr>
-        <p:txBody>
-          <a:bodyPr spcFirstLastPara="1" wrap="square" lIns="91425" tIns="45700" rIns="91425" bIns="45700" anchor="ctr" anchorCtr="0">
-            <a:noAutofit/>
-          </a:bodyPr>
-          <a:lstStyle>
-            <a:lvl1pPr lvl="0" algn="ctr">
-              <a:spcBef>
-                <a:spcPts val="0"/>
-              </a:spcBef>
-              <a:spcAft>
-                <a:spcPts val="0"/>
-              </a:spcAft>
-              <a:buSzPts val="1400"/>
-              <a:buNone/>
-              <a:defRPr/>
-            </a:lvl1pPr>
-            <a:lvl2pPr lvl="1" algn="l">
-              <a:spcBef>
-                <a:spcPts val="0"/>
-              </a:spcBef>
-              <a:spcAft>
-                <a:spcPts val="0"/>
-              </a:spcAft>
-              <a:buSzPts val="1400"/>
-              <a:buNone/>
-              <a:defRPr/>
-            </a:lvl2pPr>
-            <a:lvl3pPr lvl="2" algn="l">
-              <a:spcBef>
-                <a:spcPts val="0"/>
-              </a:spcBef>
-              <a:spcAft>
-                <a:spcPts val="0"/>
-              </a:spcAft>
-              <a:buSzPts val="1400"/>
-              <a:buNone/>
-              <a:defRPr/>
-            </a:lvl3pPr>
-            <a:lvl4pPr lvl="3" algn="l">
-              <a:spcBef>
-                <a:spcPts val="0"/>
-              </a:spcBef>
-              <a:spcAft>
-                <a:spcPts val="0"/>
-              </a:spcAft>
-              <a:buSzPts val="1400"/>
-              <a:buNone/>
-              <a:defRPr/>
-            </a:lvl4pPr>
-            <a:lvl5pPr lvl="4" algn="l">
-              <a:spcBef>
-                <a:spcPts val="0"/>
-              </a:spcBef>
-              <a:spcAft>
-                <a:spcPts val="0"/>
-              </a:spcAft>
-              <a:buSzPts val="1400"/>
-              <a:buNone/>
-              <a:defRPr/>
-            </a:lvl5pPr>
-            <a:lvl6pPr lvl="5" algn="l">
-              <a:spcBef>
-                <a:spcPts val="0"/>
-              </a:spcBef>
-              <a:spcAft>
-                <a:spcPts val="0"/>
-              </a:spcAft>
-              <a:buSzPts val="1400"/>
-              <a:buNone/>
-              <a:defRPr/>
-            </a:lvl6pPr>
-            <a:lvl7pPr lvl="6" algn="l">
-              <a:spcBef>
-                <a:spcPts val="0"/>
-              </a:spcBef>
-              <a:spcAft>
-                <a:spcPts val="0"/>
-              </a:spcAft>
-              <a:buSzPts val="1400"/>
-              <a:buNone/>
-              <a:defRPr/>
-            </a:lvl7pPr>
-            <a:lvl8pPr lvl="7" algn="l">
-              <a:spcBef>
-                <a:spcPts val="0"/>
-              </a:spcBef>
-              <a:spcAft>
-                <a:spcPts val="0"/>
-              </a:spcAft>
-              <a:buSzPts val="1400"/>
-              <a:buNone/>
-              <a:defRPr/>
-            </a:lvl8pPr>
-            <a:lvl9pPr lvl="8" algn="l">
-              <a:spcBef>
-                <a:spcPts val="0"/>
-              </a:spcBef>
-              <a:spcAft>
-                <a:spcPts val="0"/>
-              </a:spcAft>
-              <a:buSzPts val="1400"/>
-              <a:buNone/>
-              <a:defRPr/>
-            </a:lvl9pPr>
-          </a:lstStyle>
-          <a:p>
-            <a:endParaRPr/>
-          </a:p>
-        </p:txBody>
-      </p:sp>
-      <p:sp>
-        <p:nvSpPr>
-          <p:cNvPr id="32" name="Google Shape;32;p5"/>
-          <p:cNvSpPr txBox="1">
-            <a:spLocks noGrp="1"/>
-          </p:cNvSpPr>
-          <p:nvPr>
-            <p:ph type="sldNum" idx="12"/>
-          </p:nvPr>
-        </p:nvSpPr>
-        <p:spPr>
-          <a:xfrm>
-            <a:off x="6553200" y="6356350"/>
-            <a:ext cx="2133600" cy="365125"/>
-          </a:xfrm>
-          <a:prstGeom prst="rect">
-            <a:avLst/>
-          </a:prstGeom>
-          <a:noFill/>
-          <a:ln>
-            <a:noFill/>
-          </a:ln>
-        </p:spPr>
-        <p:txBody>
-          <a:bodyPr spcFirstLastPara="1" wrap="square" lIns="91425" tIns="45700" rIns="91425" bIns="45700" anchor="ctr" anchorCtr="0">
-            <a:noAutofit/>
-          </a:bodyPr>
-          <a:lstStyle>
-            <a:lvl1pPr marL="0" lvl="0" indent="0" algn="r">
-              <a:spcBef>
-                <a:spcPts val="0"/>
-              </a:spcBef>
-              <a:buNone/>
-              <a:defRPr/>
-            </a:lvl1pPr>
-            <a:lvl2pPr marL="0" lvl="1" indent="0" algn="r">
-              <a:spcBef>
-                <a:spcPts val="0"/>
-              </a:spcBef>
-              <a:buNone/>
-              <a:defRPr/>
-            </a:lvl2pPr>
-            <a:lvl3pPr marL="0" lvl="2" indent="0" algn="r">
-              <a:spcBef>
-                <a:spcPts val="0"/>
-              </a:spcBef>
-              <a:buNone/>
-              <a:defRPr/>
-            </a:lvl3pPr>
-            <a:lvl4pPr marL="0" lvl="3" indent="0" algn="r">
-              <a:spcBef>
-                <a:spcPts val="0"/>
-              </a:spcBef>
-              <a:buNone/>
-              <a:defRPr/>
-            </a:lvl4pPr>
-            <a:lvl5pPr marL="0" lvl="4" indent="0" algn="r">
-              <a:spcBef>
-                <a:spcPts val="0"/>
-              </a:spcBef>
-              <a:buNone/>
-              <a:defRPr/>
-            </a:lvl5pPr>
-            <a:lvl6pPr marL="0" lvl="5" indent="0" algn="r">
-              <a:spcBef>
-                <a:spcPts val="0"/>
-              </a:spcBef>
-              <a:buNone/>
-              <a:defRPr/>
-            </a:lvl6pPr>
-            <a:lvl7pPr marL="0" lvl="6" indent="0" algn="r">
-              <a:spcBef>
-                <a:spcPts val="0"/>
-              </a:spcBef>
-              <a:buNone/>
-              <a:defRPr/>
-            </a:lvl7pPr>
-            <a:lvl8pPr marL="0" lvl="7" indent="0" algn="r">
-              <a:spcBef>
-                <a:spcPts val="0"/>
-              </a:spcBef>
-              <a:buNone/>
-              <a:defRPr/>
-            </a:lvl8pPr>
-            <a:lvl9pPr marL="0" lvl="8" indent="0" algn="r">
-              <a:spcBef>
-                <a:spcPts val="0"/>
-              </a:spcBef>
-              <a:buNone/>
-              <a:defRPr/>
-            </a:lvl9pPr>
-          </a:lstStyle>
-          <a:p>
-            <a:pPr marL="0" lvl="0" indent="0" algn="r" rtl="0">
-              <a:spcBef>
-                <a:spcPts val="0"/>
-              </a:spcBef>
-              <a:spcAft>
-                <a:spcPts val="0"/>
-              </a:spcAft>
-              <a:buNone/>
-            </a:pPr>
-            <a:fld id="{00000000-1234-1234-1234-123412341234}" type="slidenum">
-              <a:rPr lang="en-US"/>
-              <a:t>‹#›</a:t>
-            </a:fld>
-            <a:endParaRPr/>
-          </a:p>
-        </p:txBody>
-      </p:sp>
-    </p:spTree>
-  </p:cSld>
-  <p:clrMapOvr>
-    <a:masterClrMapping/>
-  </p:clrMapOvr>
-</p:sldLayout>
-</file>
-
-<file path=ppt/slideLayouts/slideLayout3.xml><?xml version="1.0" encoding="utf-8"?>
 <p:sldLayout xmlns:a="http://schemas.openxmlformats.org/drawingml/2006/main" xmlns:r="http://schemas.openxmlformats.org/officeDocument/2006/relationships" xmlns:p="http://schemas.openxmlformats.org/presentationml/2006/main" matchingName="Two Content" type="twoObj">
   <p:cSld name="TWO_OBJECTS">
     <p:spTree>
@@ -3644,7 +3450,7 @@
 </p:sldLayout>
 </file>
 
-<file path=ppt/slideLayouts/slideLayout4.xml><?xml version="1.0" encoding="utf-8"?>
+<file path=ppt/slideLayouts/slideLayout3.xml><?xml version="1.0" encoding="utf-8"?>
 <p:sldLayout xmlns:a="http://schemas.openxmlformats.org/drawingml/2006/main" xmlns:r="http://schemas.openxmlformats.org/officeDocument/2006/relationships" xmlns:p="http://schemas.openxmlformats.org/presentationml/2006/main" matchingName="Comparison" type="twoTxTwoObj">
   <p:cSld name="TWO_OBJECTS_WITH_TEXT">
     <p:spTree>
@@ -4822,7 +4628,7 @@
 </p:sldLayout>
 </file>
 
-<file path=ppt/slideLayouts/slideLayout5.xml><?xml version="1.0" encoding="utf-8"?>
+<file path=ppt/slideLayouts/slideLayout4.xml><?xml version="1.0" encoding="utf-8"?>
 <p:sldLayout xmlns:a="http://schemas.openxmlformats.org/drawingml/2006/main" xmlns:r="http://schemas.openxmlformats.org/officeDocument/2006/relationships" xmlns:p="http://schemas.openxmlformats.org/presentationml/2006/main" matchingName="Title Only" type="titleOnly">
   <p:cSld name="TITLE_ONLY">
     <p:spTree>
@@ -5359,7 +5165,7 @@
 </p:sldLayout>
 </file>
 
-<file path=ppt/slideLayouts/slideLayout6.xml><?xml version="1.0" encoding="utf-8"?>
+<file path=ppt/slideLayouts/slideLayout5.xml><?xml version="1.0" encoding="utf-8"?>
 <p:sldLayout xmlns:a="http://schemas.openxmlformats.org/drawingml/2006/main" xmlns:r="http://schemas.openxmlformats.org/officeDocument/2006/relationships" xmlns:p="http://schemas.openxmlformats.org/presentationml/2006/main" matchingName="Content with Caption" type="objTx">
   <p:cSld name="OBJECT_WITH_CAPTION_TEXT">
     <p:spTree>
@@ -6217,7 +6023,7 @@
 </p:sldLayout>
 </file>
 
-<file path=ppt/slideLayouts/slideLayout7.xml><?xml version="1.0" encoding="utf-8"?>
+<file path=ppt/slideLayouts/slideLayout6.xml><?xml version="1.0" encoding="utf-8"?>
 <p:sldLayout xmlns:a="http://schemas.openxmlformats.org/drawingml/2006/main" xmlns:r="http://schemas.openxmlformats.org/officeDocument/2006/relationships" xmlns:p="http://schemas.openxmlformats.org/presentationml/2006/main" matchingName="Picture with Caption" type="picTx">
   <p:cSld name="PICTURE_WITH_CAPTION_TEXT">
     <p:spTree>
@@ -6946,7 +6752,7 @@
 </p:sldLayout>
 </file>
 
-<file path=ppt/slideLayouts/slideLayout8.xml><?xml version="1.0" encoding="utf-8"?>
+<file path=ppt/slideLayouts/slideLayout7.xml><?xml version="1.0" encoding="utf-8"?>
 <p:sldLayout xmlns:a="http://schemas.openxmlformats.org/drawingml/2006/main" xmlns:r="http://schemas.openxmlformats.org/officeDocument/2006/relationships" xmlns:p="http://schemas.openxmlformats.org/presentationml/2006/main" matchingName="Title and Vertical Text" type="vertTx">
   <p:cSld name="VERTICAL_TEXT">
     <p:spTree>
@@ -7643,7 +7449,7 @@
 </p:sldLayout>
 </file>
 
-<file path=ppt/slideLayouts/slideLayout9.xml><?xml version="1.0" encoding="utf-8"?>
+<file path=ppt/slideLayouts/slideLayout8.xml><?xml version="1.0" encoding="utf-8"?>
 <p:sldLayout xmlns:a="http://schemas.openxmlformats.org/drawingml/2006/main" xmlns:r="http://schemas.openxmlformats.org/officeDocument/2006/relationships" xmlns:p="http://schemas.openxmlformats.org/presentationml/2006/main" matchingName="Vertical Title and Text" type="vertTitleAndTx">
   <p:cSld name="VERTICAL_TITLE_AND_VERTICAL_TEXT">
     <p:spTree>
@@ -9348,14 +9154,13 @@
   <p:clrMap bg1="lt1" tx1="dk1" bg2="dk2" tx2="lt2" accent1="accent1" accent2="accent2" accent3="accent3" accent4="accent4" accent5="accent5" accent6="accent6" hlink="hlink" folHlink="folHlink"/>
   <p:sldLayoutIdLst>
     <p:sldLayoutId id="2147483648" r:id="rId1"/>
-    <p:sldLayoutId id="2147483651" r:id="rId2"/>
-    <p:sldLayoutId id="2147483652" r:id="rId3"/>
-    <p:sldLayoutId id="2147483653" r:id="rId4"/>
-    <p:sldLayoutId id="2147483654" r:id="rId5"/>
-    <p:sldLayoutId id="2147483655" r:id="rId6"/>
-    <p:sldLayoutId id="2147483656" r:id="rId7"/>
-    <p:sldLayoutId id="2147483657" r:id="rId8"/>
-    <p:sldLayoutId id="2147483658" r:id="rId9"/>
+    <p:sldLayoutId id="2147483652" r:id="rId2"/>
+    <p:sldLayoutId id="2147483653" r:id="rId3"/>
+    <p:sldLayoutId id="2147483654" r:id="rId4"/>
+    <p:sldLayoutId id="2147483655" r:id="rId5"/>
+    <p:sldLayoutId id="2147483656" r:id="rId6"/>
+    <p:sldLayoutId id="2147483657" r:id="rId7"/>
+    <p:sldLayoutId id="2147483658" r:id="rId8"/>
   </p:sldLayoutIdLst>
   <p:hf sldNum="0" hdr="0" ftr="0" dt="0"/>
   <p:txStyles>
@@ -10678,7 +10483,1481 @@
 </p:sld>
 </file>
 
+<file path=ppt/slides/slide10.xml><?xml version="1.0" encoding="utf-8"?>
+<p:sld xmlns:a="http://schemas.openxmlformats.org/drawingml/2006/main" xmlns:r="http://schemas.openxmlformats.org/officeDocument/2006/relationships" xmlns:p="http://schemas.openxmlformats.org/presentationml/2006/main">
+  <p:cSld>
+    <p:spTree>
+      <p:nvGrpSpPr>
+        <p:cNvPr id="1" name="Shape 83">
+          <a:extLst>
+            <a:ext uri="{FF2B5EF4-FFF2-40B4-BE49-F238E27FC236}">
+              <a16:creationId xmlns:a16="http://schemas.microsoft.com/office/drawing/2014/main" id="{2E8A46CF-A672-E505-2376-275AABB5CF69}"/>
+            </a:ext>
+          </a:extLst>
+        </p:cNvPr>
+        <p:cNvGrpSpPr/>
+        <p:nvPr/>
+      </p:nvGrpSpPr>
+      <p:grpSpPr>
+        <a:xfrm>
+          <a:off x="0" y="0"/>
+          <a:ext cx="0" cy="0"/>
+          <a:chOff x="0" y="0"/>
+          <a:chExt cx="0" cy="0"/>
+        </a:xfrm>
+      </p:grpSpPr>
+      <p:pic>
+        <p:nvPicPr>
+          <p:cNvPr id="3" name="Google Shape;123;p15" descr="image.png">
+            <a:extLst>
+              <a:ext uri="{FF2B5EF4-FFF2-40B4-BE49-F238E27FC236}">
+                <a16:creationId xmlns:a16="http://schemas.microsoft.com/office/drawing/2014/main" id="{896705B1-AC28-F9CF-A026-B8B4037CBE78}"/>
+              </a:ext>
+            </a:extLst>
+          </p:cNvPr>
+          <p:cNvPicPr preferRelativeResize="0"/>
+          <p:nvPr/>
+        </p:nvPicPr>
+        <p:blipFill rotWithShape="1">
+          <a:blip r:embed="rId3">
+            <a:alphaModFix/>
+          </a:blip>
+          <a:srcRect/>
+          <a:stretch/>
+        </p:blipFill>
+        <p:spPr>
+          <a:xfrm>
+            <a:off x="0" y="0"/>
+            <a:ext cx="12192000" cy="6858000"/>
+          </a:xfrm>
+          <a:prstGeom prst="rect">
+            <a:avLst/>
+          </a:prstGeom>
+          <a:noFill/>
+          <a:ln>
+            <a:noFill/>
+          </a:ln>
+        </p:spPr>
+      </p:pic>
+      <p:sp>
+        <p:nvSpPr>
+          <p:cNvPr id="86" name="Google Shape;86;p13">
+            <a:extLst>
+              <a:ext uri="{FF2B5EF4-FFF2-40B4-BE49-F238E27FC236}">
+                <a16:creationId xmlns:a16="http://schemas.microsoft.com/office/drawing/2014/main" id="{B90EBA20-4154-AB19-43FD-7AC4F4EC3E4B}"/>
+              </a:ext>
+            </a:extLst>
+          </p:cNvPr>
+          <p:cNvSpPr txBox="1"/>
+          <p:nvPr/>
+        </p:nvSpPr>
+        <p:spPr>
+          <a:xfrm>
+            <a:off x="480436" y="244659"/>
+            <a:ext cx="1966162" cy="507831"/>
+          </a:xfrm>
+          <a:prstGeom prst="rect">
+            <a:avLst/>
+          </a:prstGeom>
+          <a:noFill/>
+          <a:ln>
+            <a:noFill/>
+          </a:ln>
+        </p:spPr>
+        <p:txBody>
+          <a:bodyPr spcFirstLastPara="1" wrap="square" lIns="0" tIns="0" rIns="0" bIns="0" anchor="t" anchorCtr="0">
+            <a:spAutoFit/>
+          </a:bodyPr>
+          <a:lstStyle/>
+          <a:p>
+            <a:pPr marL="0" marR="0" lvl="0" indent="0" algn="l" rtl="0">
+              <a:spcBef>
+                <a:spcPts val="0"/>
+              </a:spcBef>
+              <a:spcAft>
+                <a:spcPts val="0"/>
+              </a:spcAft>
+              <a:buNone/>
+            </a:pPr>
+            <a:r>
+              <a:rPr lang="en-US" sz="3300" b="1" i="0" u="none" strike="noStrike" cap="none" dirty="0">
+                <a:solidFill>
+                  <a:srgbClr val="F9FAFB"/>
+                </a:solidFill>
+                <a:latin typeface="Urbanist"/>
+                <a:ea typeface="Urbanist"/>
+                <a:cs typeface="Urbanist"/>
+                <a:sym typeface="Urbanist"/>
+              </a:rPr>
+              <a:t>RESULTS </a:t>
+            </a:r>
+          </a:p>
+        </p:txBody>
+      </p:sp>
+      <p:sp>
+        <p:nvSpPr>
+          <p:cNvPr id="2" name="Google Shape;127;p15">
+            <a:extLst>
+              <a:ext uri="{FF2B5EF4-FFF2-40B4-BE49-F238E27FC236}">
+                <a16:creationId xmlns:a16="http://schemas.microsoft.com/office/drawing/2014/main" id="{BD1103EA-58B3-BD26-8142-5AB3E21742AE}"/>
+              </a:ext>
+            </a:extLst>
+          </p:cNvPr>
+          <p:cNvSpPr/>
+          <p:nvPr/>
+        </p:nvSpPr>
+        <p:spPr>
+          <a:xfrm>
+            <a:off x="353255" y="244659"/>
+            <a:ext cx="57150" cy="504825"/>
+          </a:xfrm>
+          <a:prstGeom prst="rect">
+            <a:avLst/>
+          </a:prstGeom>
+          <a:solidFill>
+            <a:srgbClr val="FFC000"/>
+          </a:solidFill>
+          <a:ln>
+            <a:noFill/>
+          </a:ln>
+        </p:spPr>
+        <p:txBody>
+          <a:bodyPr spcFirstLastPara="1" wrap="square" lIns="91425" tIns="45700" rIns="91425" bIns="45700" anchor="ctr" anchorCtr="0">
+            <a:noAutofit/>
+          </a:bodyPr>
+          <a:lstStyle/>
+          <a:p>
+            <a:pPr marL="0" marR="0" lvl="0" indent="0" algn="ctr" rtl="0">
+              <a:spcBef>
+                <a:spcPts val="0"/>
+              </a:spcBef>
+              <a:spcAft>
+                <a:spcPts val="0"/>
+              </a:spcAft>
+              <a:buNone/>
+            </a:pPr>
+            <a:endParaRPr sz="1800" b="0" i="0" u="none" strike="noStrike" cap="none">
+              <a:solidFill>
+                <a:schemeClr val="dk1"/>
+              </a:solidFill>
+              <a:latin typeface="Calibri"/>
+              <a:ea typeface="Calibri"/>
+              <a:cs typeface="Calibri"/>
+              <a:sym typeface="Calibri"/>
+            </a:endParaRPr>
+          </a:p>
+        </p:txBody>
+      </p:sp>
+      <p:pic>
+        <p:nvPicPr>
+          <p:cNvPr id="6" name="Picture 5">
+            <a:extLst>
+              <a:ext uri="{FF2B5EF4-FFF2-40B4-BE49-F238E27FC236}">
+                <a16:creationId xmlns:a16="http://schemas.microsoft.com/office/drawing/2014/main" id="{71716212-072A-8CCC-4D7D-67649E7E2B77}"/>
+              </a:ext>
+            </a:extLst>
+          </p:cNvPr>
+          <p:cNvPicPr>
+            <a:picLocks noChangeAspect="1"/>
+          </p:cNvPicPr>
+          <p:nvPr/>
+        </p:nvPicPr>
+        <p:blipFill>
+          <a:blip r:embed="rId4"/>
+          <a:stretch>
+            <a:fillRect/>
+          </a:stretch>
+        </p:blipFill>
+        <p:spPr>
+          <a:xfrm>
+            <a:off x="698681" y="1676817"/>
+            <a:ext cx="5553763" cy="3321486"/>
+          </a:xfrm>
+          <a:prstGeom prst="rect">
+            <a:avLst/>
+          </a:prstGeom>
+          <a:effectLst>
+            <a:softEdge rad="63500"/>
+          </a:effectLst>
+        </p:spPr>
+      </p:pic>
+      <p:pic>
+        <p:nvPicPr>
+          <p:cNvPr id="8" name="Picture 7">
+            <a:extLst>
+              <a:ext uri="{FF2B5EF4-FFF2-40B4-BE49-F238E27FC236}">
+                <a16:creationId xmlns:a16="http://schemas.microsoft.com/office/drawing/2014/main" id="{D20224DC-FEAE-7B9A-3117-702A1C2561EA}"/>
+              </a:ext>
+            </a:extLst>
+          </p:cNvPr>
+          <p:cNvPicPr>
+            <a:picLocks noChangeAspect="1"/>
+          </p:cNvPicPr>
+          <p:nvPr/>
+        </p:nvPicPr>
+        <p:blipFill>
+          <a:blip r:embed="rId5"/>
+          <a:srcRect/>
+          <a:stretch/>
+        </p:blipFill>
+        <p:spPr>
+          <a:xfrm>
+            <a:off x="6533195" y="433036"/>
+            <a:ext cx="4814460" cy="2808435"/>
+          </a:xfrm>
+          <a:prstGeom prst="rect">
+            <a:avLst/>
+          </a:prstGeom>
+          <a:effectLst>
+            <a:softEdge rad="50800"/>
+          </a:effectLst>
+        </p:spPr>
+      </p:pic>
+      <p:pic>
+        <p:nvPicPr>
+          <p:cNvPr id="10" name="Picture 9">
+            <a:extLst>
+              <a:ext uri="{FF2B5EF4-FFF2-40B4-BE49-F238E27FC236}">
+                <a16:creationId xmlns:a16="http://schemas.microsoft.com/office/drawing/2014/main" id="{82504B60-E309-1D67-ED79-AA7464F73F01}"/>
+              </a:ext>
+            </a:extLst>
+          </p:cNvPr>
+          <p:cNvPicPr>
+            <a:picLocks noChangeAspect="1"/>
+          </p:cNvPicPr>
+          <p:nvPr/>
+        </p:nvPicPr>
+        <p:blipFill>
+          <a:blip r:embed="rId6"/>
+          <a:srcRect/>
+          <a:stretch/>
+        </p:blipFill>
+        <p:spPr>
+          <a:xfrm>
+            <a:off x="6533195" y="3418965"/>
+            <a:ext cx="4814460" cy="2808435"/>
+          </a:xfrm>
+          <a:prstGeom prst="rect">
+            <a:avLst/>
+          </a:prstGeom>
+          <a:effectLst>
+            <a:softEdge rad="50800"/>
+          </a:effectLst>
+        </p:spPr>
+      </p:pic>
+    </p:spTree>
+    <p:extLst>
+      <p:ext uri="{BB962C8B-B14F-4D97-AF65-F5344CB8AC3E}">
+        <p14:creationId xmlns:p14="http://schemas.microsoft.com/office/powerpoint/2010/main" val="2667345731"/>
+      </p:ext>
+    </p:extLst>
+  </p:cSld>
+  <p:clrMapOvr>
+    <a:masterClrMapping/>
+  </p:clrMapOvr>
+</p:sld>
+</file>
+
+<file path=ppt/slides/slide11.xml><?xml version="1.0" encoding="utf-8"?>
+<p:sld xmlns:a="http://schemas.openxmlformats.org/drawingml/2006/main" xmlns:r="http://schemas.openxmlformats.org/officeDocument/2006/relationships" xmlns:p="http://schemas.openxmlformats.org/presentationml/2006/main">
+  <p:cSld>
+    <p:spTree>
+      <p:nvGrpSpPr>
+        <p:cNvPr id="1" name="Shape 122">
+          <a:extLst>
+            <a:ext uri="{FF2B5EF4-FFF2-40B4-BE49-F238E27FC236}">
+              <a16:creationId xmlns:a16="http://schemas.microsoft.com/office/drawing/2014/main" id="{22E84E0D-5883-201E-F623-319B3EE0E229}"/>
+            </a:ext>
+          </a:extLst>
+        </p:cNvPr>
+        <p:cNvGrpSpPr/>
+        <p:nvPr/>
+      </p:nvGrpSpPr>
+      <p:grpSpPr>
+        <a:xfrm>
+          <a:off x="0" y="0"/>
+          <a:ext cx="0" cy="0"/>
+          <a:chOff x="0" y="0"/>
+          <a:chExt cx="0" cy="0"/>
+        </a:xfrm>
+      </p:grpSpPr>
+      <p:pic>
+        <p:nvPicPr>
+          <p:cNvPr id="123" name="Google Shape;123;p15" descr="image.png">
+            <a:extLst>
+              <a:ext uri="{FF2B5EF4-FFF2-40B4-BE49-F238E27FC236}">
+                <a16:creationId xmlns:a16="http://schemas.microsoft.com/office/drawing/2014/main" id="{86D09913-DD2F-0AB0-1D0D-4D2A0961F1B6}"/>
+              </a:ext>
+            </a:extLst>
+          </p:cNvPr>
+          <p:cNvPicPr preferRelativeResize="0"/>
+          <p:nvPr/>
+        </p:nvPicPr>
+        <p:blipFill rotWithShape="1">
+          <a:blip r:embed="rId3">
+            <a:alphaModFix/>
+          </a:blip>
+          <a:srcRect/>
+          <a:stretch/>
+        </p:blipFill>
+        <p:spPr>
+          <a:xfrm>
+            <a:off x="0" y="0"/>
+            <a:ext cx="12192000" cy="6858000"/>
+          </a:xfrm>
+          <a:prstGeom prst="rect">
+            <a:avLst/>
+          </a:prstGeom>
+          <a:noFill/>
+          <a:ln>
+            <a:noFill/>
+          </a:ln>
+        </p:spPr>
+      </p:pic>
+      <p:sp>
+        <p:nvSpPr>
+          <p:cNvPr id="7" name="Google Shape;86;p13">
+            <a:extLst>
+              <a:ext uri="{FF2B5EF4-FFF2-40B4-BE49-F238E27FC236}">
+                <a16:creationId xmlns:a16="http://schemas.microsoft.com/office/drawing/2014/main" id="{A5BAD159-A290-DF82-EEA3-3C3C65E87330}"/>
+              </a:ext>
+            </a:extLst>
+          </p:cNvPr>
+          <p:cNvSpPr txBox="1"/>
+          <p:nvPr/>
+        </p:nvSpPr>
+        <p:spPr>
+          <a:xfrm>
+            <a:off x="474411" y="245556"/>
+            <a:ext cx="2925823" cy="507831"/>
+          </a:xfrm>
+          <a:prstGeom prst="rect">
+            <a:avLst/>
+          </a:prstGeom>
+          <a:noFill/>
+          <a:ln>
+            <a:noFill/>
+          </a:ln>
+        </p:spPr>
+        <p:txBody>
+          <a:bodyPr spcFirstLastPara="1" wrap="square" lIns="0" tIns="0" rIns="0" bIns="0" anchor="t" anchorCtr="0">
+            <a:spAutoFit/>
+          </a:bodyPr>
+          <a:lstStyle/>
+          <a:p>
+            <a:pPr lvl="0"/>
+            <a:r>
+              <a:rPr lang="en-US" sz="3300" b="1" dirty="0">
+                <a:solidFill>
+                  <a:schemeClr val="bg1"/>
+                </a:solidFill>
+              </a:rPr>
+              <a:t>CONCLUSION</a:t>
+            </a:r>
+            <a:endParaRPr lang="en-US" sz="3300" b="1" i="0" u="none" strike="noStrike" cap="none" dirty="0">
+              <a:solidFill>
+                <a:schemeClr val="bg1"/>
+              </a:solidFill>
+              <a:latin typeface="Urbanist"/>
+              <a:ea typeface="Urbanist"/>
+              <a:cs typeface="Urbanist"/>
+              <a:sym typeface="Urbanist"/>
+            </a:endParaRPr>
+          </a:p>
+        </p:txBody>
+      </p:sp>
+      <p:sp>
+        <p:nvSpPr>
+          <p:cNvPr id="8" name="Google Shape;88;p13">
+            <a:extLst>
+              <a:ext uri="{FF2B5EF4-FFF2-40B4-BE49-F238E27FC236}">
+                <a16:creationId xmlns:a16="http://schemas.microsoft.com/office/drawing/2014/main" id="{02E29998-45C5-4E1E-453F-38C00F17E41B}"/>
+              </a:ext>
+            </a:extLst>
+          </p:cNvPr>
+          <p:cNvSpPr txBox="1"/>
+          <p:nvPr/>
+        </p:nvSpPr>
+        <p:spPr>
+          <a:xfrm>
+            <a:off x="518186" y="2819997"/>
+            <a:ext cx="8390644" cy="430887"/>
+          </a:xfrm>
+          <a:prstGeom prst="rect">
+            <a:avLst/>
+          </a:prstGeom>
+          <a:noFill/>
+          <a:ln>
+            <a:noFill/>
+          </a:ln>
+        </p:spPr>
+        <p:txBody>
+          <a:bodyPr spcFirstLastPara="1" wrap="square" lIns="0" tIns="0" rIns="0" bIns="0" anchor="t" anchorCtr="0">
+            <a:spAutoFit/>
+          </a:bodyPr>
+          <a:lstStyle/>
+          <a:p>
+            <a:r>
+              <a:rPr lang="en-US" sz="2800" b="1" dirty="0">
+                <a:solidFill>
+                  <a:srgbClr val="FFC000"/>
+                </a:solidFill>
+              </a:rPr>
+              <a:t>Things We (Painfully) Learned:</a:t>
+            </a:r>
+            <a:endParaRPr lang="en-US" sz="2800" b="1" dirty="0">
+              <a:solidFill>
+                <a:srgbClr val="FFC000"/>
+              </a:solidFill>
+              <a:latin typeface="Urbanist"/>
+              <a:ea typeface="Urbanist"/>
+              <a:cs typeface="Urbanist"/>
+              <a:sym typeface="Urbanist"/>
+            </a:endParaRPr>
+          </a:p>
+        </p:txBody>
+      </p:sp>
+      <p:sp>
+        <p:nvSpPr>
+          <p:cNvPr id="9" name="Google Shape;127;p15">
+            <a:extLst>
+              <a:ext uri="{FF2B5EF4-FFF2-40B4-BE49-F238E27FC236}">
+                <a16:creationId xmlns:a16="http://schemas.microsoft.com/office/drawing/2014/main" id="{7DE61AA3-BDFB-53E7-8AEE-E924F9E2A63B}"/>
+              </a:ext>
+            </a:extLst>
+          </p:cNvPr>
+          <p:cNvSpPr/>
+          <p:nvPr/>
+        </p:nvSpPr>
+        <p:spPr>
+          <a:xfrm>
+            <a:off x="362845" y="238941"/>
+            <a:ext cx="57150" cy="504825"/>
+          </a:xfrm>
+          <a:prstGeom prst="rect">
+            <a:avLst/>
+          </a:prstGeom>
+          <a:solidFill>
+            <a:srgbClr val="FFC000"/>
+          </a:solidFill>
+          <a:ln>
+            <a:noFill/>
+          </a:ln>
+        </p:spPr>
+        <p:txBody>
+          <a:bodyPr spcFirstLastPara="1" wrap="square" lIns="91425" tIns="45700" rIns="91425" bIns="45700" anchor="ctr" anchorCtr="0">
+            <a:noAutofit/>
+          </a:bodyPr>
+          <a:lstStyle/>
+          <a:p>
+            <a:pPr marL="0" marR="0" lvl="0" indent="0" algn="ctr" rtl="0">
+              <a:spcBef>
+                <a:spcPts val="0"/>
+              </a:spcBef>
+              <a:spcAft>
+                <a:spcPts val="0"/>
+              </a:spcAft>
+              <a:buNone/>
+            </a:pPr>
+            <a:endParaRPr sz="1800" b="0" i="0" u="none" strike="noStrike" cap="none">
+              <a:solidFill>
+                <a:schemeClr val="dk1"/>
+              </a:solidFill>
+              <a:latin typeface="Calibri"/>
+              <a:ea typeface="Calibri"/>
+              <a:cs typeface="Calibri"/>
+              <a:sym typeface="Calibri"/>
+            </a:endParaRPr>
+          </a:p>
+        </p:txBody>
+      </p:sp>
+      <p:sp>
+        <p:nvSpPr>
+          <p:cNvPr id="10" name="Google Shape;88;p13">
+            <a:extLst>
+              <a:ext uri="{FF2B5EF4-FFF2-40B4-BE49-F238E27FC236}">
+                <a16:creationId xmlns:a16="http://schemas.microsoft.com/office/drawing/2014/main" id="{7C2C1466-1FB2-0FE8-5D35-72ED36D33363}"/>
+              </a:ext>
+            </a:extLst>
+          </p:cNvPr>
+          <p:cNvSpPr txBox="1"/>
+          <p:nvPr/>
+        </p:nvSpPr>
+        <p:spPr>
+          <a:xfrm>
+            <a:off x="518186" y="1402671"/>
+            <a:ext cx="10290836" cy="1246495"/>
+          </a:xfrm>
+          <a:prstGeom prst="rect">
+            <a:avLst/>
+          </a:prstGeom>
+          <a:noFill/>
+          <a:ln>
+            <a:noFill/>
+          </a:ln>
+        </p:spPr>
+        <p:txBody>
+          <a:bodyPr spcFirstLastPara="1" wrap="square" lIns="0" tIns="0" rIns="0" bIns="0" anchor="t" anchorCtr="0">
+            <a:spAutoFit/>
+          </a:bodyPr>
+          <a:lstStyle/>
+          <a:p>
+            <a:pPr marL="285750" indent="-285750">
+              <a:lnSpc>
+                <a:spcPct val="150000"/>
+              </a:lnSpc>
+              <a:buClr>
+                <a:srgbClr val="FFC000"/>
+              </a:buClr>
+              <a:buFont typeface="Wingdings" panose="05000000000000000000" pitchFamily="2" charset="2"/>
+              <a:buChar char="Ø"/>
+            </a:pPr>
+            <a:r>
+              <a:rPr lang="en-US" sz="1800" dirty="0">
+                <a:solidFill>
+                  <a:schemeClr val="bg1">
+                    <a:lumMod val="95000"/>
+                  </a:schemeClr>
+                </a:solidFill>
+              </a:rPr>
+              <a:t>Minor hallucinations are still present.</a:t>
+            </a:r>
+            <a:endParaRPr lang="nn-NO" sz="1800" dirty="0">
+              <a:solidFill>
+                <a:schemeClr val="bg1">
+                  <a:lumMod val="95000"/>
+                </a:schemeClr>
+              </a:solidFill>
+            </a:endParaRPr>
+          </a:p>
+          <a:p>
+            <a:pPr marL="285750" indent="-285750">
+              <a:lnSpc>
+                <a:spcPct val="150000"/>
+              </a:lnSpc>
+              <a:buClr>
+                <a:srgbClr val="FFC000"/>
+              </a:buClr>
+              <a:buFont typeface="Wingdings" panose="05000000000000000000" pitchFamily="2" charset="2"/>
+              <a:buChar char="Ø"/>
+            </a:pPr>
+            <a:r>
+              <a:rPr lang="en-US" sz="1800" dirty="0">
+                <a:solidFill>
+                  <a:schemeClr val="bg1">
+                    <a:lumMod val="95000"/>
+                  </a:schemeClr>
+                </a:solidFill>
+              </a:rPr>
+              <a:t>The model identifies the correct chunk in most cases, but consistency is not guaranteed.</a:t>
+            </a:r>
+          </a:p>
+          <a:p>
+            <a:pPr marL="285750" indent="-285750">
+              <a:lnSpc>
+                <a:spcPct val="150000"/>
+              </a:lnSpc>
+              <a:buClr>
+                <a:srgbClr val="FFC000"/>
+              </a:buClr>
+              <a:buFont typeface="Wingdings" panose="05000000000000000000" pitchFamily="2" charset="2"/>
+              <a:buChar char="Ø"/>
+            </a:pPr>
+            <a:r>
+              <a:rPr lang="en-US" sz="1800" dirty="0">
+                <a:solidFill>
+                  <a:schemeClr val="bg1">
+                    <a:lumMod val="95000"/>
+                  </a:schemeClr>
+                </a:solidFill>
+              </a:rPr>
+              <a:t>In a high-stakes domain like this, even small errors are unacceptable.</a:t>
+            </a:r>
+          </a:p>
+        </p:txBody>
+      </p:sp>
+      <p:sp>
+        <p:nvSpPr>
+          <p:cNvPr id="2" name="Google Shape;88;p13">
+            <a:extLst>
+              <a:ext uri="{FF2B5EF4-FFF2-40B4-BE49-F238E27FC236}">
+                <a16:creationId xmlns:a16="http://schemas.microsoft.com/office/drawing/2014/main" id="{68F5B512-688F-EB69-6D20-66CF92AF704D}"/>
+              </a:ext>
+            </a:extLst>
+          </p:cNvPr>
+          <p:cNvSpPr txBox="1"/>
+          <p:nvPr/>
+        </p:nvSpPr>
+        <p:spPr>
+          <a:xfrm>
+            <a:off x="518186" y="998943"/>
+            <a:ext cx="8390644" cy="430887"/>
+          </a:xfrm>
+          <a:prstGeom prst="rect">
+            <a:avLst/>
+          </a:prstGeom>
+          <a:noFill/>
+          <a:ln>
+            <a:noFill/>
+          </a:ln>
+        </p:spPr>
+        <p:txBody>
+          <a:bodyPr spcFirstLastPara="1" wrap="square" lIns="0" tIns="0" rIns="0" bIns="0" anchor="t" anchorCtr="0">
+            <a:spAutoFit/>
+          </a:bodyPr>
+          <a:lstStyle/>
+          <a:p>
+            <a:r>
+              <a:rPr lang="en-US" sz="2800" b="1" dirty="0">
+                <a:solidFill>
+                  <a:srgbClr val="FFC000"/>
+                </a:solidFill>
+              </a:rPr>
+              <a:t>Looks Good… But Can Be Better:</a:t>
+            </a:r>
+            <a:endParaRPr lang="en-US" sz="2800" b="1" dirty="0">
+              <a:solidFill>
+                <a:srgbClr val="FFC000"/>
+              </a:solidFill>
+              <a:latin typeface="Urbanist"/>
+              <a:ea typeface="Urbanist"/>
+              <a:cs typeface="Urbanist"/>
+              <a:sym typeface="Urbanist"/>
+            </a:endParaRPr>
+          </a:p>
+        </p:txBody>
+      </p:sp>
+      <p:sp>
+        <p:nvSpPr>
+          <p:cNvPr id="4" name="Google Shape;88;p13">
+            <a:extLst>
+              <a:ext uri="{FF2B5EF4-FFF2-40B4-BE49-F238E27FC236}">
+                <a16:creationId xmlns:a16="http://schemas.microsoft.com/office/drawing/2014/main" id="{7A731623-AF71-D9C4-3F4F-D36B48E9C774}"/>
+              </a:ext>
+            </a:extLst>
+          </p:cNvPr>
+          <p:cNvSpPr txBox="1"/>
+          <p:nvPr/>
+        </p:nvSpPr>
+        <p:spPr>
+          <a:xfrm>
+            <a:off x="518186" y="3256052"/>
+            <a:ext cx="10290836" cy="1246495"/>
+          </a:xfrm>
+          <a:prstGeom prst="rect">
+            <a:avLst/>
+          </a:prstGeom>
+          <a:noFill/>
+          <a:ln>
+            <a:noFill/>
+          </a:ln>
+        </p:spPr>
+        <p:txBody>
+          <a:bodyPr spcFirstLastPara="1" wrap="square" lIns="0" tIns="0" rIns="0" bIns="0" anchor="t" anchorCtr="0">
+            <a:spAutoFit/>
+          </a:bodyPr>
+          <a:lstStyle/>
+          <a:p>
+            <a:pPr marL="285750" indent="-285750">
+              <a:lnSpc>
+                <a:spcPct val="150000"/>
+              </a:lnSpc>
+              <a:buClr>
+                <a:srgbClr val="FFC000"/>
+              </a:buClr>
+              <a:buFont typeface="Wingdings" panose="05000000000000000000" pitchFamily="2" charset="2"/>
+              <a:buChar char="Ø"/>
+            </a:pPr>
+            <a:r>
+              <a:rPr lang="en-US" sz="1800" dirty="0">
+                <a:solidFill>
+                  <a:schemeClr val="bg1">
+                    <a:lumMod val="95000"/>
+                  </a:schemeClr>
+                </a:solidFill>
+              </a:rPr>
+              <a:t>Each model comes with its own pros and cons.</a:t>
+            </a:r>
+            <a:endParaRPr lang="nn-NO" sz="1800" dirty="0">
+              <a:solidFill>
+                <a:schemeClr val="bg1">
+                  <a:lumMod val="95000"/>
+                </a:schemeClr>
+              </a:solidFill>
+            </a:endParaRPr>
+          </a:p>
+          <a:p>
+            <a:pPr marL="285750" indent="-285750">
+              <a:lnSpc>
+                <a:spcPct val="150000"/>
+              </a:lnSpc>
+              <a:buClr>
+                <a:srgbClr val="FFC000"/>
+              </a:buClr>
+              <a:buFont typeface="Wingdings" panose="05000000000000000000" pitchFamily="2" charset="2"/>
+              <a:buChar char="Ø"/>
+            </a:pPr>
+            <a:r>
+              <a:rPr lang="en-US" sz="1800" dirty="0">
+                <a:solidFill>
+                  <a:schemeClr val="bg1">
+                    <a:lumMod val="95000"/>
+                  </a:schemeClr>
+                </a:solidFill>
+              </a:rPr>
+              <a:t>Hallucination handling needs to be significantly stricter.</a:t>
+            </a:r>
+          </a:p>
+          <a:p>
+            <a:pPr marL="285750" indent="-285750">
+              <a:lnSpc>
+                <a:spcPct val="150000"/>
+              </a:lnSpc>
+              <a:buClr>
+                <a:srgbClr val="FFC000"/>
+              </a:buClr>
+              <a:buFont typeface="Wingdings" panose="05000000000000000000" pitchFamily="2" charset="2"/>
+              <a:buChar char="Ø"/>
+            </a:pPr>
+            <a:r>
+              <a:rPr lang="en-US" sz="1800" dirty="0">
+                <a:solidFill>
+                  <a:schemeClr val="bg1">
+                    <a:lumMod val="95000"/>
+                  </a:schemeClr>
+                </a:solidFill>
+              </a:rPr>
+              <a:t>A diverse set of KPIs is needed to properly evaluate model quality.</a:t>
+            </a:r>
+          </a:p>
+        </p:txBody>
+      </p:sp>
+      <p:sp>
+        <p:nvSpPr>
+          <p:cNvPr id="5" name="Google Shape;88;p13">
+            <a:extLst>
+              <a:ext uri="{FF2B5EF4-FFF2-40B4-BE49-F238E27FC236}">
+                <a16:creationId xmlns:a16="http://schemas.microsoft.com/office/drawing/2014/main" id="{EE9F0940-BEB7-7F69-4337-5B01468429BD}"/>
+              </a:ext>
+            </a:extLst>
+          </p:cNvPr>
+          <p:cNvSpPr txBox="1"/>
+          <p:nvPr/>
+        </p:nvSpPr>
+        <p:spPr>
+          <a:xfrm>
+            <a:off x="518186" y="4673378"/>
+            <a:ext cx="8390644" cy="430887"/>
+          </a:xfrm>
+          <a:prstGeom prst="rect">
+            <a:avLst/>
+          </a:prstGeom>
+          <a:noFill/>
+          <a:ln>
+            <a:noFill/>
+          </a:ln>
+        </p:spPr>
+        <p:txBody>
+          <a:bodyPr spcFirstLastPara="1" wrap="square" lIns="0" tIns="0" rIns="0" bIns="0" anchor="t" anchorCtr="0">
+            <a:spAutoFit/>
+          </a:bodyPr>
+          <a:lstStyle/>
+          <a:p>
+            <a:r>
+              <a:rPr lang="en-US" sz="2800" b="1" dirty="0">
+                <a:solidFill>
+                  <a:srgbClr val="FFC000"/>
+                </a:solidFill>
+              </a:rPr>
+              <a:t>Where Do We Go From Here?</a:t>
+            </a:r>
+            <a:endParaRPr lang="en-US" sz="2800" b="1" dirty="0">
+              <a:solidFill>
+                <a:srgbClr val="FFC000"/>
+              </a:solidFill>
+              <a:latin typeface="Urbanist"/>
+              <a:ea typeface="Urbanist"/>
+              <a:cs typeface="Urbanist"/>
+              <a:sym typeface="Urbanist"/>
+            </a:endParaRPr>
+          </a:p>
+        </p:txBody>
+      </p:sp>
+      <p:sp>
+        <p:nvSpPr>
+          <p:cNvPr id="6" name="Google Shape;88;p13">
+            <a:extLst>
+              <a:ext uri="{FF2B5EF4-FFF2-40B4-BE49-F238E27FC236}">
+                <a16:creationId xmlns:a16="http://schemas.microsoft.com/office/drawing/2014/main" id="{F7AA6849-9885-F48C-208C-4D449D98E7BA}"/>
+              </a:ext>
+            </a:extLst>
+          </p:cNvPr>
+          <p:cNvSpPr txBox="1"/>
+          <p:nvPr/>
+        </p:nvSpPr>
+        <p:spPr>
+          <a:xfrm>
+            <a:off x="518186" y="5104265"/>
+            <a:ext cx="10290836" cy="1246495"/>
+          </a:xfrm>
+          <a:prstGeom prst="rect">
+            <a:avLst/>
+          </a:prstGeom>
+          <a:noFill/>
+          <a:ln>
+            <a:noFill/>
+          </a:ln>
+        </p:spPr>
+        <p:txBody>
+          <a:bodyPr spcFirstLastPara="1" wrap="square" lIns="0" tIns="0" rIns="0" bIns="0" anchor="t" anchorCtr="0">
+            <a:spAutoFit/>
+          </a:bodyPr>
+          <a:lstStyle/>
+          <a:p>
+            <a:pPr marL="285750" indent="-285750">
+              <a:lnSpc>
+                <a:spcPct val="150000"/>
+              </a:lnSpc>
+              <a:buClr>
+                <a:srgbClr val="FFC000"/>
+              </a:buClr>
+              <a:buFont typeface="Wingdings" panose="05000000000000000000" pitchFamily="2" charset="2"/>
+              <a:buChar char="Ø"/>
+            </a:pPr>
+            <a:r>
+              <a:rPr lang="en-US" sz="1800" dirty="0">
+                <a:solidFill>
+                  <a:schemeClr val="bg1">
+                    <a:lumMod val="95000"/>
+                  </a:schemeClr>
+                </a:solidFill>
+              </a:rPr>
+              <a:t>Experiment with additional models and architectures. </a:t>
+            </a:r>
+          </a:p>
+          <a:p>
+            <a:pPr marL="285750" indent="-285750">
+              <a:lnSpc>
+                <a:spcPct val="150000"/>
+              </a:lnSpc>
+              <a:buClr>
+                <a:srgbClr val="FFC000"/>
+              </a:buClr>
+              <a:buFont typeface="Wingdings" panose="05000000000000000000" pitchFamily="2" charset="2"/>
+              <a:buChar char="Ø"/>
+            </a:pPr>
+            <a:r>
+              <a:rPr lang="en-US" sz="1800" dirty="0">
+                <a:solidFill>
+                  <a:schemeClr val="bg1">
+                    <a:lumMod val="95000"/>
+                  </a:schemeClr>
+                </a:solidFill>
+              </a:rPr>
+              <a:t>Introduce more rigorous validation and consistency checks in the RAG pipeline.</a:t>
+            </a:r>
+          </a:p>
+          <a:p>
+            <a:pPr marL="285750" indent="-285750">
+              <a:lnSpc>
+                <a:spcPct val="150000"/>
+              </a:lnSpc>
+              <a:buClr>
+                <a:srgbClr val="FFC000"/>
+              </a:buClr>
+              <a:buFont typeface="Wingdings" panose="05000000000000000000" pitchFamily="2" charset="2"/>
+              <a:buChar char="Ø"/>
+            </a:pPr>
+            <a:r>
+              <a:rPr lang="en-US" sz="1800" dirty="0">
+                <a:solidFill>
+                  <a:schemeClr val="bg1">
+                    <a:lumMod val="95000"/>
+                  </a:schemeClr>
+                </a:solidFill>
+              </a:rPr>
+              <a:t>Add a faithfulness metric using an LLM judge to verify citation-explanation alignment. </a:t>
+            </a:r>
+          </a:p>
+        </p:txBody>
+      </p:sp>
+    </p:spTree>
+    <p:extLst>
+      <p:ext uri="{BB962C8B-B14F-4D97-AF65-F5344CB8AC3E}">
+        <p14:creationId xmlns:p14="http://schemas.microsoft.com/office/powerpoint/2010/main" val="2600582393"/>
+      </p:ext>
+    </p:extLst>
+  </p:cSld>
+  <p:clrMapOvr>
+    <a:masterClrMapping/>
+  </p:clrMapOvr>
+</p:sld>
+</file>
+
 <file path=ppt/slides/slide2.xml><?xml version="1.0" encoding="utf-8"?>
+<p:sld xmlns:a="http://schemas.openxmlformats.org/drawingml/2006/main" xmlns:r="http://schemas.openxmlformats.org/officeDocument/2006/relationships" xmlns:p="http://schemas.openxmlformats.org/presentationml/2006/main">
+  <p:cSld>
+    <p:spTree>
+      <p:nvGrpSpPr>
+        <p:cNvPr id="1" name="Shape 122">
+          <a:extLst>
+            <a:ext uri="{FF2B5EF4-FFF2-40B4-BE49-F238E27FC236}">
+              <a16:creationId xmlns:a16="http://schemas.microsoft.com/office/drawing/2014/main" id="{DA692B55-BDA9-8245-F423-219541F95B85}"/>
+            </a:ext>
+          </a:extLst>
+        </p:cNvPr>
+        <p:cNvGrpSpPr/>
+        <p:nvPr/>
+      </p:nvGrpSpPr>
+      <p:grpSpPr>
+        <a:xfrm>
+          <a:off x="0" y="0"/>
+          <a:ext cx="0" cy="0"/>
+          <a:chOff x="0" y="0"/>
+          <a:chExt cx="0" cy="0"/>
+        </a:xfrm>
+      </p:grpSpPr>
+      <p:pic>
+        <p:nvPicPr>
+          <p:cNvPr id="123" name="Google Shape;123;p15" descr="image.png">
+            <a:extLst>
+              <a:ext uri="{FF2B5EF4-FFF2-40B4-BE49-F238E27FC236}">
+                <a16:creationId xmlns:a16="http://schemas.microsoft.com/office/drawing/2014/main" id="{1E383F0D-BCE5-E80F-12FC-719A86FBD391}"/>
+              </a:ext>
+            </a:extLst>
+          </p:cNvPr>
+          <p:cNvPicPr preferRelativeResize="0"/>
+          <p:nvPr/>
+        </p:nvPicPr>
+        <p:blipFill rotWithShape="1">
+          <a:blip r:embed="rId3">
+            <a:alphaModFix/>
+          </a:blip>
+          <a:srcRect/>
+          <a:stretch/>
+        </p:blipFill>
+        <p:spPr>
+          <a:xfrm>
+            <a:off x="0" y="0"/>
+            <a:ext cx="12192000" cy="6858000"/>
+          </a:xfrm>
+          <a:prstGeom prst="rect">
+            <a:avLst/>
+          </a:prstGeom>
+          <a:noFill/>
+          <a:ln>
+            <a:noFill/>
+          </a:ln>
+        </p:spPr>
+      </p:pic>
+      <p:sp>
+        <p:nvSpPr>
+          <p:cNvPr id="7" name="Google Shape;86;p13">
+            <a:extLst>
+              <a:ext uri="{FF2B5EF4-FFF2-40B4-BE49-F238E27FC236}">
+                <a16:creationId xmlns:a16="http://schemas.microsoft.com/office/drawing/2014/main" id="{37C60CE0-6A6B-821B-01BE-EA0EB08ABFD0}"/>
+              </a:ext>
+            </a:extLst>
+          </p:cNvPr>
+          <p:cNvSpPr txBox="1"/>
+          <p:nvPr/>
+        </p:nvSpPr>
+        <p:spPr>
+          <a:xfrm>
+            <a:off x="492822" y="270246"/>
+            <a:ext cx="6560627" cy="507831"/>
+          </a:xfrm>
+          <a:prstGeom prst="rect">
+            <a:avLst/>
+          </a:prstGeom>
+          <a:noFill/>
+          <a:ln>
+            <a:noFill/>
+          </a:ln>
+        </p:spPr>
+        <p:txBody>
+          <a:bodyPr spcFirstLastPara="1" wrap="square" lIns="0" tIns="0" rIns="0" bIns="0" anchor="t" anchorCtr="0">
+            <a:spAutoFit/>
+          </a:bodyPr>
+          <a:lstStyle/>
+          <a:p>
+            <a:pPr lvl="0"/>
+            <a:r>
+              <a:rPr lang="en-US" sz="3300" b="1" i="0" u="none" strike="noStrike" cap="none" dirty="0">
+                <a:solidFill>
+                  <a:schemeClr val="bg1"/>
+                </a:solidFill>
+                <a:latin typeface="Urbanist"/>
+                <a:ea typeface="Urbanist"/>
+                <a:cs typeface="Urbanist"/>
+                <a:sym typeface="Urbanist"/>
+              </a:rPr>
+              <a:t>SYNTHETIC </a:t>
+            </a:r>
+            <a:r>
+              <a:rPr lang="en-US" sz="3300" b="1" i="0" u="none" strike="noStrike" cap="none" dirty="0">
+                <a:solidFill>
+                  <a:srgbClr val="FFC000"/>
+                </a:solidFill>
+                <a:latin typeface="Urbanist"/>
+                <a:ea typeface="Urbanist"/>
+                <a:cs typeface="Urbanist"/>
+                <a:sym typeface="Urbanist"/>
+              </a:rPr>
+              <a:t>DATA</a:t>
+            </a:r>
+            <a:r>
+              <a:rPr lang="en-US" sz="3300" b="1" i="0" u="none" strike="noStrike" cap="none" dirty="0">
+                <a:solidFill>
+                  <a:schemeClr val="bg1"/>
+                </a:solidFill>
+                <a:latin typeface="Urbanist"/>
+                <a:ea typeface="Urbanist"/>
+                <a:cs typeface="Urbanist"/>
+                <a:sym typeface="Urbanist"/>
+              </a:rPr>
+              <a:t> GENERATION</a:t>
+            </a:r>
+          </a:p>
+        </p:txBody>
+      </p:sp>
+      <p:sp>
+        <p:nvSpPr>
+          <p:cNvPr id="9" name="Google Shape;127;p15">
+            <a:extLst>
+              <a:ext uri="{FF2B5EF4-FFF2-40B4-BE49-F238E27FC236}">
+                <a16:creationId xmlns:a16="http://schemas.microsoft.com/office/drawing/2014/main" id="{CC6D742D-5CBE-932F-1003-672B5AE0F53B}"/>
+              </a:ext>
+            </a:extLst>
+          </p:cNvPr>
+          <p:cNvSpPr/>
+          <p:nvPr/>
+        </p:nvSpPr>
+        <p:spPr>
+          <a:xfrm>
+            <a:off x="362845" y="238941"/>
+            <a:ext cx="57150" cy="504825"/>
+          </a:xfrm>
+          <a:prstGeom prst="rect">
+            <a:avLst/>
+          </a:prstGeom>
+          <a:solidFill>
+            <a:srgbClr val="FFC000"/>
+          </a:solidFill>
+          <a:ln>
+            <a:noFill/>
+          </a:ln>
+        </p:spPr>
+        <p:txBody>
+          <a:bodyPr spcFirstLastPara="1" wrap="square" lIns="91425" tIns="45700" rIns="91425" bIns="45700" anchor="ctr" anchorCtr="0">
+            <a:noAutofit/>
+          </a:bodyPr>
+          <a:lstStyle/>
+          <a:p>
+            <a:pPr marL="0" marR="0" lvl="0" indent="0" algn="ctr" rtl="0">
+              <a:spcBef>
+                <a:spcPts val="0"/>
+              </a:spcBef>
+              <a:spcAft>
+                <a:spcPts val="0"/>
+              </a:spcAft>
+              <a:buNone/>
+            </a:pPr>
+            <a:endParaRPr sz="1800" b="0" i="0" u="none" strike="noStrike" cap="none">
+              <a:solidFill>
+                <a:schemeClr val="dk1"/>
+              </a:solidFill>
+              <a:latin typeface="Calibri"/>
+              <a:ea typeface="Calibri"/>
+              <a:cs typeface="Calibri"/>
+              <a:sym typeface="Calibri"/>
+            </a:endParaRPr>
+          </a:p>
+        </p:txBody>
+      </p:sp>
+      <p:pic>
+        <p:nvPicPr>
+          <p:cNvPr id="4" name="תמונה 3" descr="תמונה שמכילה טקסט, צילום מסך, גופן, תפריט&#10;&#10;תוכן בינה מלאכותית גנרטיבית עשוי להיות שגוי.">
+            <a:extLst>
+              <a:ext uri="{FF2B5EF4-FFF2-40B4-BE49-F238E27FC236}">
+                <a16:creationId xmlns:a16="http://schemas.microsoft.com/office/drawing/2014/main" id="{3D9614C0-9EFA-8920-C82C-FCA2E1B87FFD}"/>
+              </a:ext>
+            </a:extLst>
+          </p:cNvPr>
+          <p:cNvPicPr>
+            <a:picLocks noChangeAspect="1"/>
+          </p:cNvPicPr>
+          <p:nvPr/>
+        </p:nvPicPr>
+        <p:blipFill>
+          <a:blip r:embed="rId4"/>
+          <a:stretch>
+            <a:fillRect/>
+          </a:stretch>
+        </p:blipFill>
+        <p:spPr>
+          <a:xfrm>
+            <a:off x="4102021" y="919114"/>
+            <a:ext cx="7597157" cy="4025359"/>
+          </a:xfrm>
+          <a:prstGeom prst="rect">
+            <a:avLst/>
+          </a:prstGeom>
+        </p:spPr>
+      </p:pic>
+      <p:sp>
+        <p:nvSpPr>
+          <p:cNvPr id="5" name="תיבת טקסט 4">
+            <a:extLst>
+              <a:ext uri="{FF2B5EF4-FFF2-40B4-BE49-F238E27FC236}">
+                <a16:creationId xmlns:a16="http://schemas.microsoft.com/office/drawing/2014/main" id="{189EFFD1-CA4B-DA34-2B42-0DC8F420D33A}"/>
+              </a:ext>
+            </a:extLst>
+          </p:cNvPr>
+          <p:cNvSpPr txBox="1"/>
+          <p:nvPr/>
+        </p:nvSpPr>
+        <p:spPr>
+          <a:xfrm>
+            <a:off x="8609758" y="589877"/>
+            <a:ext cx="3001617" cy="307777"/>
+          </a:xfrm>
+          <a:prstGeom prst="rect">
+            <a:avLst/>
+          </a:prstGeom>
+          <a:noFill/>
+        </p:spPr>
+        <p:txBody>
+          <a:bodyPr wrap="square" rtlCol="1">
+            <a:spAutoFit/>
+          </a:bodyPr>
+          <a:lstStyle/>
+          <a:p>
+            <a:r>
+              <a:rPr lang="en-US" b="1" dirty="0">
+                <a:solidFill>
+                  <a:srgbClr val="FFFFFF"/>
+                </a:solidFill>
+              </a:rPr>
+              <a:t>THE PROMPT</a:t>
+            </a:r>
+            <a:endParaRPr lang="he-IL" b="1" dirty="0">
+              <a:solidFill>
+                <a:srgbClr val="FFFFFF"/>
+              </a:solidFill>
+            </a:endParaRPr>
+          </a:p>
+        </p:txBody>
+      </p:sp>
+      <p:sp>
+        <p:nvSpPr>
+          <p:cNvPr id="8" name="תיבת טקסט 7">
+            <a:extLst>
+              <a:ext uri="{FF2B5EF4-FFF2-40B4-BE49-F238E27FC236}">
+                <a16:creationId xmlns:a16="http://schemas.microsoft.com/office/drawing/2014/main" id="{BACA53EA-2DFE-826F-3433-2B3802DA1DB9}"/>
+              </a:ext>
+            </a:extLst>
+          </p:cNvPr>
+          <p:cNvSpPr txBox="1"/>
+          <p:nvPr/>
+        </p:nvSpPr>
+        <p:spPr>
+          <a:xfrm>
+            <a:off x="665921" y="4944473"/>
+            <a:ext cx="2365514" cy="307777"/>
+          </a:xfrm>
+          <a:prstGeom prst="rect">
+            <a:avLst/>
+          </a:prstGeom>
+          <a:noFill/>
+        </p:spPr>
+        <p:txBody>
+          <a:bodyPr wrap="square" rtlCol="1">
+            <a:spAutoFit/>
+          </a:bodyPr>
+          <a:lstStyle/>
+          <a:p>
+            <a:r>
+              <a:rPr lang="en-US" b="1" dirty="0">
+                <a:solidFill>
+                  <a:srgbClr val="FFFFFF"/>
+                </a:solidFill>
+              </a:rPr>
+              <a:t>SAMPLE EXAMPLE</a:t>
+            </a:r>
+            <a:endParaRPr lang="he-IL" b="1" dirty="0">
+              <a:solidFill>
+                <a:srgbClr val="FFFFFF"/>
+              </a:solidFill>
+            </a:endParaRPr>
+          </a:p>
+        </p:txBody>
+      </p:sp>
+      <p:pic>
+        <p:nvPicPr>
+          <p:cNvPr id="10" name="תמונה 9">
+            <a:extLst>
+              <a:ext uri="{FF2B5EF4-FFF2-40B4-BE49-F238E27FC236}">
+                <a16:creationId xmlns:a16="http://schemas.microsoft.com/office/drawing/2014/main" id="{1ECCA144-FA96-5E7D-6D5B-EFE9243F53ED}"/>
+              </a:ext>
+            </a:extLst>
+          </p:cNvPr>
+          <p:cNvPicPr>
+            <a:picLocks noChangeAspect="1"/>
+          </p:cNvPicPr>
+          <p:nvPr/>
+        </p:nvPicPr>
+        <p:blipFill>
+          <a:blip r:embed="rId5"/>
+          <a:stretch>
+            <a:fillRect/>
+          </a:stretch>
+        </p:blipFill>
+        <p:spPr>
+          <a:xfrm>
+            <a:off x="665921" y="5262122"/>
+            <a:ext cx="10129630" cy="1353528"/>
+          </a:xfrm>
+          <a:prstGeom prst="rect">
+            <a:avLst/>
+          </a:prstGeom>
+        </p:spPr>
+      </p:pic>
+    </p:spTree>
+    <p:extLst>
+      <p:ext uri="{BB962C8B-B14F-4D97-AF65-F5344CB8AC3E}">
+        <p14:creationId xmlns:p14="http://schemas.microsoft.com/office/powerpoint/2010/main" val="4018527867"/>
+      </p:ext>
+    </p:extLst>
+  </p:cSld>
+  <p:clrMapOvr>
+    <a:masterClrMapping/>
+  </p:clrMapOvr>
+</p:sld>
+</file>
+
+<file path=ppt/slides/slide3.xml><?xml version="1.0" encoding="utf-8"?>
+<p:sld xmlns:a="http://schemas.openxmlformats.org/drawingml/2006/main" xmlns:r="http://schemas.openxmlformats.org/officeDocument/2006/relationships" xmlns:p="http://schemas.openxmlformats.org/presentationml/2006/main">
+  <p:cSld>
+    <p:spTree>
+      <p:nvGrpSpPr>
+        <p:cNvPr id="1" name="Shape 122">
+          <a:extLst>
+            <a:ext uri="{FF2B5EF4-FFF2-40B4-BE49-F238E27FC236}">
+              <a16:creationId xmlns:a16="http://schemas.microsoft.com/office/drawing/2014/main" id="{5D22EA4D-ED81-0E69-84AD-C2067A74DC02}"/>
+            </a:ext>
+          </a:extLst>
+        </p:cNvPr>
+        <p:cNvGrpSpPr/>
+        <p:nvPr/>
+      </p:nvGrpSpPr>
+      <p:grpSpPr>
+        <a:xfrm>
+          <a:off x="0" y="0"/>
+          <a:ext cx="0" cy="0"/>
+          <a:chOff x="0" y="0"/>
+          <a:chExt cx="0" cy="0"/>
+        </a:xfrm>
+      </p:grpSpPr>
+      <p:pic>
+        <p:nvPicPr>
+          <p:cNvPr id="123" name="Google Shape;123;p15" descr="image.png">
+            <a:extLst>
+              <a:ext uri="{FF2B5EF4-FFF2-40B4-BE49-F238E27FC236}">
+                <a16:creationId xmlns:a16="http://schemas.microsoft.com/office/drawing/2014/main" id="{F1844D87-E68D-547A-9874-17BB4086E21B}"/>
+              </a:ext>
+            </a:extLst>
+          </p:cNvPr>
+          <p:cNvPicPr preferRelativeResize="0"/>
+          <p:nvPr/>
+        </p:nvPicPr>
+        <p:blipFill rotWithShape="1">
+          <a:blip r:embed="rId3">
+            <a:alphaModFix/>
+          </a:blip>
+          <a:srcRect/>
+          <a:stretch/>
+        </p:blipFill>
+        <p:spPr>
+          <a:xfrm>
+            <a:off x="0" y="0"/>
+            <a:ext cx="12192000" cy="6858000"/>
+          </a:xfrm>
+          <a:prstGeom prst="rect">
+            <a:avLst/>
+          </a:prstGeom>
+          <a:noFill/>
+          <a:ln>
+            <a:noFill/>
+          </a:ln>
+        </p:spPr>
+      </p:pic>
+      <p:sp>
+        <p:nvSpPr>
+          <p:cNvPr id="7" name="Google Shape;86;p13">
+            <a:extLst>
+              <a:ext uri="{FF2B5EF4-FFF2-40B4-BE49-F238E27FC236}">
+                <a16:creationId xmlns:a16="http://schemas.microsoft.com/office/drawing/2014/main" id="{4648F711-7823-D3B6-3CBD-6C37B3DB5262}"/>
+              </a:ext>
+            </a:extLst>
+          </p:cNvPr>
+          <p:cNvSpPr txBox="1"/>
+          <p:nvPr/>
+        </p:nvSpPr>
+        <p:spPr>
+          <a:xfrm>
+            <a:off x="492822" y="270246"/>
+            <a:ext cx="5902159" cy="507831"/>
+          </a:xfrm>
+          <a:prstGeom prst="rect">
+            <a:avLst/>
+          </a:prstGeom>
+          <a:noFill/>
+          <a:ln>
+            <a:noFill/>
+          </a:ln>
+        </p:spPr>
+        <p:txBody>
+          <a:bodyPr spcFirstLastPara="1" wrap="square" lIns="0" tIns="0" rIns="0" bIns="0" anchor="t" anchorCtr="0">
+            <a:spAutoFit/>
+          </a:bodyPr>
+          <a:lstStyle/>
+          <a:p>
+            <a:pPr lvl="0"/>
+            <a:r>
+              <a:rPr lang="en-US" sz="3300" b="1" dirty="0">
+                <a:solidFill>
+                  <a:schemeClr val="bg1"/>
+                </a:solidFill>
+              </a:rPr>
+              <a:t>INTER</a:t>
+            </a:r>
+            <a:r>
+              <a:rPr lang="en-US" sz="3300" b="1" dirty="0">
+                <a:solidFill>
+                  <a:srgbClr val="FFC000"/>
+                </a:solidFill>
+              </a:rPr>
+              <a:t>ACTIVE</a:t>
+            </a:r>
+            <a:r>
+              <a:rPr lang="en-US" sz="3300" b="1" dirty="0">
+                <a:solidFill>
+                  <a:schemeClr val="bg1"/>
+                </a:solidFill>
+              </a:rPr>
+              <a:t> INTERFACE</a:t>
+            </a:r>
+            <a:endParaRPr lang="en-US" sz="3300" b="1" i="0" u="none" strike="noStrike" cap="none" dirty="0">
+              <a:solidFill>
+                <a:schemeClr val="bg1"/>
+              </a:solidFill>
+              <a:latin typeface="Urbanist"/>
+              <a:ea typeface="Urbanist"/>
+              <a:cs typeface="Urbanist"/>
+              <a:sym typeface="Urbanist"/>
+            </a:endParaRPr>
+          </a:p>
+        </p:txBody>
+      </p:sp>
+      <p:sp>
+        <p:nvSpPr>
+          <p:cNvPr id="9" name="Google Shape;127;p15">
+            <a:extLst>
+              <a:ext uri="{FF2B5EF4-FFF2-40B4-BE49-F238E27FC236}">
+                <a16:creationId xmlns:a16="http://schemas.microsoft.com/office/drawing/2014/main" id="{BC99C2AC-37EE-007F-CFFE-FF02ED76E2BF}"/>
+              </a:ext>
+            </a:extLst>
+          </p:cNvPr>
+          <p:cNvSpPr/>
+          <p:nvPr/>
+        </p:nvSpPr>
+        <p:spPr>
+          <a:xfrm>
+            <a:off x="362845" y="238941"/>
+            <a:ext cx="57150" cy="504825"/>
+          </a:xfrm>
+          <a:prstGeom prst="rect">
+            <a:avLst/>
+          </a:prstGeom>
+          <a:solidFill>
+            <a:srgbClr val="FFC000"/>
+          </a:solidFill>
+          <a:ln>
+            <a:noFill/>
+          </a:ln>
+        </p:spPr>
+        <p:txBody>
+          <a:bodyPr spcFirstLastPara="1" wrap="square" lIns="91425" tIns="45700" rIns="91425" bIns="45700" anchor="ctr" anchorCtr="0">
+            <a:noAutofit/>
+          </a:bodyPr>
+          <a:lstStyle/>
+          <a:p>
+            <a:pPr marL="0" marR="0" lvl="0" indent="0" algn="ctr" rtl="0">
+              <a:spcBef>
+                <a:spcPts val="0"/>
+              </a:spcBef>
+              <a:spcAft>
+                <a:spcPts val="0"/>
+              </a:spcAft>
+              <a:buNone/>
+            </a:pPr>
+            <a:endParaRPr sz="1800" b="0" i="0" u="none" strike="noStrike" cap="none">
+              <a:solidFill>
+                <a:schemeClr val="dk1"/>
+              </a:solidFill>
+              <a:latin typeface="Calibri"/>
+              <a:ea typeface="Calibri"/>
+              <a:cs typeface="Calibri"/>
+              <a:sym typeface="Calibri"/>
+            </a:endParaRPr>
+          </a:p>
+        </p:txBody>
+      </p:sp>
+      <p:pic>
+        <p:nvPicPr>
+          <p:cNvPr id="5" name="תמונה 4" descr="תמונה שמכילה טקסט, צילום מסך, מסמך, גופן&#10;&#10;תוכן בינה מלאכותית גנרטיבית עשוי להיות שגוי.">
+            <a:extLst>
+              <a:ext uri="{FF2B5EF4-FFF2-40B4-BE49-F238E27FC236}">
+                <a16:creationId xmlns:a16="http://schemas.microsoft.com/office/drawing/2014/main" id="{E16F0125-CCAC-6C9E-D41C-8433A6F004E1}"/>
+              </a:ext>
+            </a:extLst>
+          </p:cNvPr>
+          <p:cNvPicPr>
+            <a:picLocks noChangeAspect="1"/>
+          </p:cNvPicPr>
+          <p:nvPr/>
+        </p:nvPicPr>
+        <p:blipFill>
+          <a:blip r:embed="rId4"/>
+          <a:stretch>
+            <a:fillRect/>
+          </a:stretch>
+        </p:blipFill>
+        <p:spPr>
+          <a:xfrm>
+            <a:off x="306456" y="1444567"/>
+            <a:ext cx="11579087" cy="3968866"/>
+          </a:xfrm>
+          <a:prstGeom prst="rect">
+            <a:avLst/>
+          </a:prstGeom>
+        </p:spPr>
+      </p:pic>
+    </p:spTree>
+    <p:extLst>
+      <p:ext uri="{BB962C8B-B14F-4D97-AF65-F5344CB8AC3E}">
+        <p14:creationId xmlns:p14="http://schemas.microsoft.com/office/powerpoint/2010/main" val="193813281"/>
+      </p:ext>
+    </p:extLst>
+  </p:cSld>
+  <p:clrMapOvr>
+    <a:masterClrMapping/>
+  </p:clrMapOvr>
+</p:sld>
+</file>
+
+<file path=ppt/slides/slide4.xml><?xml version="1.0" encoding="utf-8"?>
 <p:sld xmlns:a="http://schemas.openxmlformats.org/drawingml/2006/main" xmlns:r="http://schemas.openxmlformats.org/officeDocument/2006/relationships" xmlns:p="http://schemas.openxmlformats.org/presentationml/2006/main">
   <p:cSld>
     <p:spTree>
@@ -11250,7 +12529,7 @@
         <p:spPr>
           <a:xfrm>
             <a:off x="6454516" y="1663051"/>
-            <a:ext cx="5622755" cy="3046988"/>
+            <a:ext cx="5622755" cy="2215991"/>
           </a:xfrm>
           <a:prstGeom prst="rect">
             <a:avLst/>
@@ -11347,12 +12626,10 @@
             </a:r>
           </a:p>
           <a:p>
-            <a:pPr marL="285750" indent="-285750">
+            <a:pPr>
               <a:buClr>
                 <a:srgbClr val="FFC000"/>
               </a:buClr>
-              <a:buFont typeface="Wingdings" panose="05000000000000000000" pitchFamily="2" charset="2"/>
-              <a:buChar char="Ø"/>
             </a:pPr>
             <a:endParaRPr lang="en-US" sz="1800" dirty="0">
               <a:solidFill>
@@ -11378,60 +12655,6 @@
                   </a:schemeClr>
                 </a:solidFill>
               </a:rPr>
-              <a:t>Citation Accuracy - </a:t>
-            </a:r>
-            <a:r>
-              <a:rPr lang="en-US" sz="1800" dirty="0">
-                <a:solidFill>
-                  <a:schemeClr val="bg1">
-                    <a:lumMod val="95000"/>
-                  </a:schemeClr>
-                </a:solidFill>
-              </a:rPr>
-              <a:t>verifies that the model’s answer is correctly supported by the cited regulatory source.</a:t>
-            </a:r>
-            <a:endParaRPr lang="en-US" sz="1800" dirty="0">
-              <a:solidFill>
-                <a:schemeClr val="bg1">
-                  <a:lumMod val="95000"/>
-                </a:schemeClr>
-              </a:solidFill>
-              <a:latin typeface="Inter SemiBold"/>
-              <a:ea typeface="Inter SemiBold"/>
-              <a:cs typeface="Inter SemiBold"/>
-              <a:sym typeface="Inter SemiBold"/>
-            </a:endParaRPr>
-          </a:p>
-          <a:p>
-            <a:pPr>
-              <a:buClr>
-                <a:srgbClr val="FFC000"/>
-              </a:buClr>
-            </a:pPr>
-            <a:endParaRPr lang="en-US" sz="1800" dirty="0">
-              <a:solidFill>
-                <a:schemeClr val="bg1">
-                  <a:lumMod val="95000"/>
-                </a:schemeClr>
-              </a:solidFill>
-            </a:endParaRPr>
-          </a:p>
-          <a:p>
-            <a:pPr marL="285750" indent="-285750">
-              <a:buClr>
-                <a:srgbClr val="FFC000"/>
-              </a:buClr>
-              <a:buFont typeface="Wingdings" panose="05000000000000000000" pitchFamily="2" charset="2"/>
-              <a:buChar char="Ø"/>
-            </a:pPr>
-            <a:r>
-              <a:rPr lang="en-US" sz="1800" b="1" dirty="0">
-                <a:solidFill>
-                  <a:schemeClr val="bg1">
-                    <a:lumMod val="95000"/>
-                  </a:schemeClr>
-                </a:solidFill>
-              </a:rPr>
               <a:t>Hallucination Rate </a:t>
             </a:r>
             <a:r>
@@ -11442,13 +12665,29 @@
                   </a:schemeClr>
                 </a:solidFill>
               </a:rPr>
-              <a:t>– unsupported or fabricated claims.</a:t>
+              <a:t>–</a:t>
+            </a:r>
+            <a:r>
+              <a:rPr lang="en-US" sz="1800" b="1" dirty="0">
+                <a:solidFill>
+                  <a:schemeClr val="bg1">
+                    <a:lumMod val="95000"/>
+                  </a:schemeClr>
+                </a:solidFill>
+              </a:rPr>
+              <a:t> </a:t>
+            </a:r>
+            <a:r>
+              <a:rPr lang="en-US" sz="1800" dirty="0">
+                <a:solidFill>
+                  <a:srgbClr val="F2F2F2"/>
+                </a:solidFill>
+              </a:rPr>
+              <a:t>percentage of definitive answers provided when the context contains no relevant information.</a:t>
             </a:r>
             <a:endParaRPr lang="en-US" sz="1800" dirty="0">
               <a:solidFill>
-                <a:schemeClr val="bg1">
-                  <a:lumMod val="95000"/>
-                </a:schemeClr>
+                <a:srgbClr val="F2F2F2"/>
               </a:solidFill>
               <a:latin typeface="Inter SemiBold"/>
               <a:ea typeface="Inter SemiBold"/>
@@ -11725,7 +12964,7 @@
 </p:sld>
 </file>
 
-<file path=ppt/slides/slide3.xml><?xml version="1.0" encoding="utf-8"?>
+<file path=ppt/slides/slide5.xml><?xml version="1.0" encoding="utf-8"?>
 <p:sld xmlns:a="http://schemas.openxmlformats.org/drawingml/2006/main" xmlns:r="http://schemas.openxmlformats.org/officeDocument/2006/relationships" xmlns:p="http://schemas.openxmlformats.org/presentationml/2006/main">
   <p:cSld>
     <p:spTree>
@@ -12440,7 +13679,260 @@
 </p:sld>
 </file>
 
-<file path=ppt/slides/slide4.xml><?xml version="1.0" encoding="utf-8"?>
+<file path=ppt/slides/slide6.xml><?xml version="1.0" encoding="utf-8"?>
+<p:sld xmlns:a="http://schemas.openxmlformats.org/drawingml/2006/main" xmlns:r="http://schemas.openxmlformats.org/officeDocument/2006/relationships" xmlns:p="http://schemas.openxmlformats.org/presentationml/2006/main">
+  <p:cSld>
+    <p:spTree>
+      <p:nvGrpSpPr>
+        <p:cNvPr id="1" name="Shape 122">
+          <a:extLst>
+            <a:ext uri="{FF2B5EF4-FFF2-40B4-BE49-F238E27FC236}">
+              <a16:creationId xmlns:a16="http://schemas.microsoft.com/office/drawing/2014/main" id="{1BDEC25A-F51A-0F72-81C7-0362C45153CC}"/>
+            </a:ext>
+          </a:extLst>
+        </p:cNvPr>
+        <p:cNvGrpSpPr/>
+        <p:nvPr/>
+      </p:nvGrpSpPr>
+      <p:grpSpPr>
+        <a:xfrm>
+          <a:off x="0" y="0"/>
+          <a:ext cx="0" cy="0"/>
+          <a:chOff x="0" y="0"/>
+          <a:chExt cx="0" cy="0"/>
+        </a:xfrm>
+      </p:grpSpPr>
+      <p:pic>
+        <p:nvPicPr>
+          <p:cNvPr id="123" name="Google Shape;123;p15" descr="image.png">
+            <a:extLst>
+              <a:ext uri="{FF2B5EF4-FFF2-40B4-BE49-F238E27FC236}">
+                <a16:creationId xmlns:a16="http://schemas.microsoft.com/office/drawing/2014/main" id="{5D6BFB6A-2D84-18F1-01A3-2F3098A9259C}"/>
+              </a:ext>
+            </a:extLst>
+          </p:cNvPr>
+          <p:cNvPicPr preferRelativeResize="0"/>
+          <p:nvPr/>
+        </p:nvPicPr>
+        <p:blipFill rotWithShape="1">
+          <a:blip r:embed="rId3">
+            <a:alphaModFix/>
+          </a:blip>
+          <a:srcRect/>
+          <a:stretch/>
+        </p:blipFill>
+        <p:spPr>
+          <a:xfrm>
+            <a:off x="0" y="0"/>
+            <a:ext cx="12192000" cy="6858000"/>
+          </a:xfrm>
+          <a:prstGeom prst="rect">
+            <a:avLst/>
+          </a:prstGeom>
+          <a:noFill/>
+          <a:ln>
+            <a:noFill/>
+          </a:ln>
+        </p:spPr>
+      </p:pic>
+      <p:sp>
+        <p:nvSpPr>
+          <p:cNvPr id="24" name="Google Shape;86;p13">
+            <a:extLst>
+              <a:ext uri="{FF2B5EF4-FFF2-40B4-BE49-F238E27FC236}">
+                <a16:creationId xmlns:a16="http://schemas.microsoft.com/office/drawing/2014/main" id="{15735ED6-4B78-2590-17B1-8F0CA0F9AD3A}"/>
+              </a:ext>
+            </a:extLst>
+          </p:cNvPr>
+          <p:cNvSpPr txBox="1"/>
+          <p:nvPr/>
+        </p:nvSpPr>
+        <p:spPr>
+          <a:xfrm>
+            <a:off x="492822" y="238941"/>
+            <a:ext cx="5902159" cy="507831"/>
+          </a:xfrm>
+          <a:prstGeom prst="rect">
+            <a:avLst/>
+          </a:prstGeom>
+          <a:noFill/>
+          <a:ln>
+            <a:noFill/>
+          </a:ln>
+        </p:spPr>
+        <p:txBody>
+          <a:bodyPr spcFirstLastPara="1" wrap="square" lIns="0" tIns="0" rIns="0" bIns="0" anchor="t" anchorCtr="0">
+            <a:spAutoFit/>
+          </a:bodyPr>
+          <a:lstStyle/>
+          <a:p>
+            <a:pPr lvl="0"/>
+            <a:r>
+              <a:rPr lang="en-US" sz="3300" b="1" i="0" u="none" strike="noStrike" cap="none">
+                <a:solidFill>
+                  <a:schemeClr val="bg1"/>
+                </a:solidFill>
+                <a:latin typeface="Urbanist"/>
+                <a:ea typeface="Urbanist"/>
+                <a:cs typeface="Urbanist"/>
+                <a:sym typeface="Urbanist"/>
+              </a:rPr>
+              <a:t>PI</a:t>
+            </a:r>
+            <a:r>
+              <a:rPr lang="en-US" sz="3300" b="1">
+                <a:solidFill>
+                  <a:schemeClr val="bg1"/>
+                </a:solidFill>
+                <a:latin typeface="Urbanist"/>
+                <a:ea typeface="Urbanist"/>
+                <a:cs typeface="Urbanist"/>
+                <a:sym typeface="Urbanist"/>
+              </a:rPr>
+              <a:t>PELINE</a:t>
+            </a:r>
+            <a:endParaRPr lang="en-US" sz="3300" b="1" i="0" u="none" strike="noStrike" cap="none" dirty="0">
+              <a:solidFill>
+                <a:schemeClr val="bg1"/>
+              </a:solidFill>
+              <a:latin typeface="Urbanist"/>
+              <a:ea typeface="Urbanist"/>
+              <a:cs typeface="Urbanist"/>
+              <a:sym typeface="Urbanist"/>
+            </a:endParaRPr>
+          </a:p>
+        </p:txBody>
+      </p:sp>
+      <p:sp>
+        <p:nvSpPr>
+          <p:cNvPr id="25" name="Google Shape;127;p15">
+            <a:extLst>
+              <a:ext uri="{FF2B5EF4-FFF2-40B4-BE49-F238E27FC236}">
+                <a16:creationId xmlns:a16="http://schemas.microsoft.com/office/drawing/2014/main" id="{1FDAC2C6-7DDC-DDEF-02DF-0F121B7BB855}"/>
+              </a:ext>
+            </a:extLst>
+          </p:cNvPr>
+          <p:cNvSpPr/>
+          <p:nvPr/>
+        </p:nvSpPr>
+        <p:spPr>
+          <a:xfrm>
+            <a:off x="362845" y="238941"/>
+            <a:ext cx="57150" cy="504825"/>
+          </a:xfrm>
+          <a:prstGeom prst="rect">
+            <a:avLst/>
+          </a:prstGeom>
+          <a:solidFill>
+            <a:srgbClr val="FFC000"/>
+          </a:solidFill>
+          <a:ln>
+            <a:noFill/>
+          </a:ln>
+        </p:spPr>
+        <p:txBody>
+          <a:bodyPr spcFirstLastPara="1" wrap="square" lIns="91425" tIns="45700" rIns="91425" bIns="45700" anchor="ctr" anchorCtr="0">
+            <a:noAutofit/>
+          </a:bodyPr>
+          <a:lstStyle/>
+          <a:p>
+            <a:pPr marL="0" marR="0" lvl="0" indent="0" algn="ctr" rtl="0">
+              <a:spcBef>
+                <a:spcPts val="0"/>
+              </a:spcBef>
+              <a:spcAft>
+                <a:spcPts val="0"/>
+              </a:spcAft>
+              <a:buNone/>
+            </a:pPr>
+            <a:endParaRPr sz="1800" b="0" i="0" u="none" strike="noStrike" cap="none">
+              <a:solidFill>
+                <a:schemeClr val="dk1"/>
+              </a:solidFill>
+              <a:latin typeface="Calibri"/>
+              <a:ea typeface="Calibri"/>
+              <a:cs typeface="Calibri"/>
+              <a:sym typeface="Calibri"/>
+            </a:endParaRPr>
+          </a:p>
+        </p:txBody>
+      </p:sp>
+      <p:sp>
+        <p:nvSpPr>
+          <p:cNvPr id="12" name="TextBox 11">
+            <a:extLst>
+              <a:ext uri="{FF2B5EF4-FFF2-40B4-BE49-F238E27FC236}">
+                <a16:creationId xmlns:a16="http://schemas.microsoft.com/office/drawing/2014/main" id="{FA1DA838-4605-842E-7C7A-1511466AB799}"/>
+              </a:ext>
+            </a:extLst>
+          </p:cNvPr>
+          <p:cNvSpPr txBox="1"/>
+          <p:nvPr/>
+        </p:nvSpPr>
+        <p:spPr>
+          <a:xfrm>
+            <a:off x="3017827" y="3095607"/>
+            <a:ext cx="6158392" cy="307777"/>
+          </a:xfrm>
+          <a:prstGeom prst="rect">
+            <a:avLst/>
+          </a:prstGeom>
+          <a:noFill/>
+        </p:spPr>
+        <p:txBody>
+          <a:bodyPr wrap="square">
+            <a:spAutoFit/>
+          </a:bodyPr>
+          <a:lstStyle/>
+          <a:p>
+            <a:endParaRPr lang="LID4096" dirty="0"/>
+          </a:p>
+        </p:txBody>
+      </p:sp>
+      <p:pic>
+        <p:nvPicPr>
+          <p:cNvPr id="30" name="Picture 29">
+            <a:extLst>
+              <a:ext uri="{FF2B5EF4-FFF2-40B4-BE49-F238E27FC236}">
+                <a16:creationId xmlns:a16="http://schemas.microsoft.com/office/drawing/2014/main" id="{B4C4EF44-0DC6-FCAF-C7A9-A8E29B14B6E2}"/>
+              </a:ext>
+            </a:extLst>
+          </p:cNvPr>
+          <p:cNvPicPr>
+            <a:picLocks noChangeAspect="1"/>
+          </p:cNvPicPr>
+          <p:nvPr/>
+        </p:nvPicPr>
+        <p:blipFill>
+          <a:blip r:embed="rId4"/>
+          <a:stretch>
+            <a:fillRect/>
+          </a:stretch>
+        </p:blipFill>
+        <p:spPr>
+          <a:xfrm>
+            <a:off x="1615542" y="788288"/>
+            <a:ext cx="8960916" cy="5579586"/>
+          </a:xfrm>
+          <a:prstGeom prst="rect">
+            <a:avLst/>
+          </a:prstGeom>
+        </p:spPr>
+      </p:pic>
+    </p:spTree>
+    <p:extLst>
+      <p:ext uri="{BB962C8B-B14F-4D97-AF65-F5344CB8AC3E}">
+        <p14:creationId xmlns:p14="http://schemas.microsoft.com/office/powerpoint/2010/main" val="3417468925"/>
+      </p:ext>
+    </p:extLst>
+  </p:cSld>
+  <p:clrMapOvr>
+    <a:masterClrMapping/>
+  </p:clrMapOvr>
+</p:sld>
+</file>
+
+<file path=ppt/slides/slide7.xml><?xml version="1.0" encoding="utf-8"?>
 <p:sld xmlns:a="http://schemas.openxmlformats.org/drawingml/2006/main" xmlns:r="http://schemas.openxmlformats.org/officeDocument/2006/relationships" xmlns:p="http://schemas.openxmlformats.org/presentationml/2006/main">
   <p:cSld>
     <p:spTree>
@@ -12484,7 +13976,7 @@
         </p:blipFill>
         <p:spPr>
           <a:xfrm>
-            <a:off x="0" y="0"/>
+            <a:off x="0" y="-6137"/>
             <a:ext cx="12192000" cy="6858000"/>
           </a:xfrm>
           <a:prstGeom prst="rect">
@@ -13263,7 +14755,362 @@
 </p:sld>
 </file>
 
-<file path=ppt/slides/slide5.xml><?xml version="1.0" encoding="utf-8"?>
+<file path=ppt/slides/slide8.xml><?xml version="1.0" encoding="utf-8"?>
+<p:sld xmlns:a="http://schemas.openxmlformats.org/drawingml/2006/main" xmlns:r="http://schemas.openxmlformats.org/officeDocument/2006/relationships" xmlns:p="http://schemas.openxmlformats.org/presentationml/2006/main">
+  <p:cSld>
+    <p:spTree>
+      <p:nvGrpSpPr>
+        <p:cNvPr id="1" name="Shape 122">
+          <a:extLst>
+            <a:ext uri="{FF2B5EF4-FFF2-40B4-BE49-F238E27FC236}">
+              <a16:creationId xmlns:a16="http://schemas.microsoft.com/office/drawing/2014/main" id="{4DB194B1-3DCE-3F91-906D-B3B2BB0187BA}"/>
+            </a:ext>
+          </a:extLst>
+        </p:cNvPr>
+        <p:cNvGrpSpPr/>
+        <p:nvPr/>
+      </p:nvGrpSpPr>
+      <p:grpSpPr>
+        <a:xfrm>
+          <a:off x="0" y="0"/>
+          <a:ext cx="0" cy="0"/>
+          <a:chOff x="0" y="0"/>
+          <a:chExt cx="0" cy="0"/>
+        </a:xfrm>
+      </p:grpSpPr>
+      <p:pic>
+        <p:nvPicPr>
+          <p:cNvPr id="123" name="Google Shape;123;p15" descr="image.png">
+            <a:extLst>
+              <a:ext uri="{FF2B5EF4-FFF2-40B4-BE49-F238E27FC236}">
+                <a16:creationId xmlns:a16="http://schemas.microsoft.com/office/drawing/2014/main" id="{FFF7EC57-F27E-3B9C-3D28-C68F24BEEA67}"/>
+              </a:ext>
+            </a:extLst>
+          </p:cNvPr>
+          <p:cNvPicPr preferRelativeResize="0"/>
+          <p:nvPr/>
+        </p:nvPicPr>
+        <p:blipFill rotWithShape="1">
+          <a:blip r:embed="rId3">
+            <a:alphaModFix/>
+          </a:blip>
+          <a:srcRect/>
+          <a:stretch/>
+        </p:blipFill>
+        <p:spPr>
+          <a:xfrm>
+            <a:off x="0" y="0"/>
+            <a:ext cx="12192000" cy="6858000"/>
+          </a:xfrm>
+          <a:prstGeom prst="rect">
+            <a:avLst/>
+          </a:prstGeom>
+          <a:noFill/>
+          <a:ln>
+            <a:noFill/>
+          </a:ln>
+        </p:spPr>
+      </p:pic>
+      <p:sp>
+        <p:nvSpPr>
+          <p:cNvPr id="7" name="Google Shape;86;p13">
+            <a:extLst>
+              <a:ext uri="{FF2B5EF4-FFF2-40B4-BE49-F238E27FC236}">
+                <a16:creationId xmlns:a16="http://schemas.microsoft.com/office/drawing/2014/main" id="{A0E41725-3725-DB1B-AAAC-E101FDD678A0}"/>
+              </a:ext>
+            </a:extLst>
+          </p:cNvPr>
+          <p:cNvSpPr txBox="1"/>
+          <p:nvPr/>
+        </p:nvSpPr>
+        <p:spPr>
+          <a:xfrm>
+            <a:off x="492822" y="270246"/>
+            <a:ext cx="7667204" cy="507831"/>
+          </a:xfrm>
+          <a:prstGeom prst="rect">
+            <a:avLst/>
+          </a:prstGeom>
+          <a:noFill/>
+          <a:ln>
+            <a:noFill/>
+          </a:ln>
+        </p:spPr>
+        <p:txBody>
+          <a:bodyPr spcFirstLastPara="1" wrap="square" lIns="0" tIns="0" rIns="0" bIns="0" anchor="t" anchorCtr="0">
+            <a:spAutoFit/>
+          </a:bodyPr>
+          <a:lstStyle/>
+          <a:p>
+            <a:pPr lvl="0"/>
+            <a:r>
+              <a:rPr lang="en-US" sz="3300" b="1" dirty="0">
+                <a:solidFill>
+                  <a:schemeClr val="bg1"/>
+                </a:solidFill>
+              </a:rPr>
+              <a:t>FINE-</a:t>
+            </a:r>
+            <a:r>
+              <a:rPr lang="en-US" sz="3300" b="1" dirty="0">
+                <a:solidFill>
+                  <a:srgbClr val="FFC000"/>
+                </a:solidFill>
+              </a:rPr>
+              <a:t>TUNNING</a:t>
+            </a:r>
+            <a:r>
+              <a:rPr lang="en-US" sz="3300" b="1" dirty="0">
+                <a:solidFill>
+                  <a:schemeClr val="bg1"/>
+                </a:solidFill>
+              </a:rPr>
+              <a:t> INPUT</a:t>
+            </a:r>
+            <a:r>
+              <a:rPr lang="en-US" sz="3300" b="1" dirty="0">
+                <a:solidFill>
+                  <a:srgbClr val="FFC000"/>
+                </a:solidFill>
+              </a:rPr>
+              <a:t> &amp;</a:t>
+            </a:r>
+            <a:r>
+              <a:rPr lang="en-US" sz="3300" b="1" dirty="0">
+                <a:solidFill>
+                  <a:schemeClr val="bg1"/>
+                </a:solidFill>
+              </a:rPr>
+              <a:t> OUTPUT</a:t>
+            </a:r>
+            <a:endParaRPr lang="en-US" sz="3300" b="1" i="0" u="none" strike="noStrike" cap="none" dirty="0">
+              <a:solidFill>
+                <a:schemeClr val="bg1"/>
+              </a:solidFill>
+              <a:latin typeface="Urbanist"/>
+              <a:ea typeface="Urbanist"/>
+              <a:cs typeface="Urbanist"/>
+              <a:sym typeface="Urbanist"/>
+            </a:endParaRPr>
+          </a:p>
+        </p:txBody>
+      </p:sp>
+      <p:sp>
+        <p:nvSpPr>
+          <p:cNvPr id="9" name="Google Shape;127;p15">
+            <a:extLst>
+              <a:ext uri="{FF2B5EF4-FFF2-40B4-BE49-F238E27FC236}">
+                <a16:creationId xmlns:a16="http://schemas.microsoft.com/office/drawing/2014/main" id="{EBB9D8EE-C032-86C9-FC6A-FFD29353D4B9}"/>
+              </a:ext>
+            </a:extLst>
+          </p:cNvPr>
+          <p:cNvSpPr/>
+          <p:nvPr/>
+        </p:nvSpPr>
+        <p:spPr>
+          <a:xfrm>
+            <a:off x="362845" y="238941"/>
+            <a:ext cx="57150" cy="504825"/>
+          </a:xfrm>
+          <a:prstGeom prst="rect">
+            <a:avLst/>
+          </a:prstGeom>
+          <a:solidFill>
+            <a:srgbClr val="FFC000"/>
+          </a:solidFill>
+          <a:ln>
+            <a:noFill/>
+          </a:ln>
+        </p:spPr>
+        <p:txBody>
+          <a:bodyPr spcFirstLastPara="1" wrap="square" lIns="91425" tIns="45700" rIns="91425" bIns="45700" anchor="ctr" anchorCtr="0">
+            <a:noAutofit/>
+          </a:bodyPr>
+          <a:lstStyle/>
+          <a:p>
+            <a:pPr marL="0" marR="0" lvl="0" indent="0" algn="ctr" rtl="0">
+              <a:spcBef>
+                <a:spcPts val="0"/>
+              </a:spcBef>
+              <a:spcAft>
+                <a:spcPts val="0"/>
+              </a:spcAft>
+              <a:buNone/>
+            </a:pPr>
+            <a:endParaRPr sz="1800" b="0" i="0" u="none" strike="noStrike" cap="none">
+              <a:solidFill>
+                <a:schemeClr val="dk1"/>
+              </a:solidFill>
+              <a:latin typeface="Calibri"/>
+              <a:ea typeface="Calibri"/>
+              <a:cs typeface="Calibri"/>
+              <a:sym typeface="Calibri"/>
+            </a:endParaRPr>
+          </a:p>
+        </p:txBody>
+      </p:sp>
+      <p:pic>
+        <p:nvPicPr>
+          <p:cNvPr id="3" name="תמונה 2">
+            <a:extLst>
+              <a:ext uri="{FF2B5EF4-FFF2-40B4-BE49-F238E27FC236}">
+                <a16:creationId xmlns:a16="http://schemas.microsoft.com/office/drawing/2014/main" id="{59D3E3D6-D96D-E2EE-4EF6-2DCE39ED571D}"/>
+              </a:ext>
+            </a:extLst>
+          </p:cNvPr>
+          <p:cNvPicPr>
+            <a:picLocks noChangeAspect="1"/>
+          </p:cNvPicPr>
+          <p:nvPr/>
+        </p:nvPicPr>
+        <p:blipFill>
+          <a:blip r:embed="rId4"/>
+          <a:stretch>
+            <a:fillRect/>
+          </a:stretch>
+        </p:blipFill>
+        <p:spPr>
+          <a:xfrm>
+            <a:off x="95250" y="3989501"/>
+            <a:ext cx="12001500" cy="923925"/>
+          </a:xfrm>
+          <a:prstGeom prst="rect">
+            <a:avLst/>
+          </a:prstGeom>
+        </p:spPr>
+      </p:pic>
+      <p:sp>
+        <p:nvSpPr>
+          <p:cNvPr id="4" name="תיבת טקסט 3">
+            <a:extLst>
+              <a:ext uri="{FF2B5EF4-FFF2-40B4-BE49-F238E27FC236}">
+                <a16:creationId xmlns:a16="http://schemas.microsoft.com/office/drawing/2014/main" id="{3C2372BA-E655-8F7D-F346-6D249FA732EF}"/>
+              </a:ext>
+            </a:extLst>
+          </p:cNvPr>
+          <p:cNvSpPr txBox="1"/>
+          <p:nvPr/>
+        </p:nvSpPr>
+        <p:spPr>
+          <a:xfrm>
+            <a:off x="4580283" y="3681724"/>
+            <a:ext cx="3031434" cy="307777"/>
+          </a:xfrm>
+          <a:prstGeom prst="rect">
+            <a:avLst/>
+          </a:prstGeom>
+          <a:noFill/>
+        </p:spPr>
+        <p:txBody>
+          <a:bodyPr wrap="square" rtlCol="1">
+            <a:spAutoFit/>
+          </a:bodyPr>
+          <a:lstStyle/>
+          <a:p>
+            <a:r>
+              <a:rPr lang="en-US" b="1" dirty="0">
+                <a:solidFill>
+                  <a:srgbClr val="F2F2F2"/>
+                </a:solidFill>
+              </a:rPr>
+              <a:t>OUTPUT EXAMPLE (INFERENCE)</a:t>
+            </a:r>
+            <a:endParaRPr lang="he-IL" b="1" dirty="0">
+              <a:solidFill>
+                <a:srgbClr val="F2F2F2"/>
+              </a:solidFill>
+            </a:endParaRPr>
+          </a:p>
+        </p:txBody>
+      </p:sp>
+      <p:pic>
+        <p:nvPicPr>
+          <p:cNvPr id="8" name="תמונה 7">
+            <a:extLst>
+              <a:ext uri="{FF2B5EF4-FFF2-40B4-BE49-F238E27FC236}">
+                <a16:creationId xmlns:a16="http://schemas.microsoft.com/office/drawing/2014/main" id="{16EB5E19-4C90-13BC-CE9A-F22F50C3A428}"/>
+              </a:ext>
+            </a:extLst>
+          </p:cNvPr>
+          <p:cNvPicPr>
+            <a:picLocks noChangeAspect="1"/>
+          </p:cNvPicPr>
+          <p:nvPr/>
+        </p:nvPicPr>
+        <p:blipFill>
+          <a:blip r:embed="rId5"/>
+          <a:stretch>
+            <a:fillRect/>
+          </a:stretch>
+        </p:blipFill>
+        <p:spPr>
+          <a:xfrm>
+            <a:off x="257175" y="2207393"/>
+            <a:ext cx="11677650" cy="676275"/>
+          </a:xfrm>
+          <a:prstGeom prst="rect">
+            <a:avLst/>
+          </a:prstGeom>
+        </p:spPr>
+      </p:pic>
+      <p:sp>
+        <p:nvSpPr>
+          <p:cNvPr id="11" name="תיבת טקסט 10">
+            <a:extLst>
+              <a:ext uri="{FF2B5EF4-FFF2-40B4-BE49-F238E27FC236}">
+                <a16:creationId xmlns:a16="http://schemas.microsoft.com/office/drawing/2014/main" id="{E5BDA33C-1611-2303-0C8B-6EB213733218}"/>
+              </a:ext>
+            </a:extLst>
+          </p:cNvPr>
+          <p:cNvSpPr txBox="1"/>
+          <p:nvPr/>
+        </p:nvSpPr>
+        <p:spPr>
+          <a:xfrm>
+            <a:off x="4580283" y="1899616"/>
+            <a:ext cx="3848100" cy="307777"/>
+          </a:xfrm>
+          <a:prstGeom prst="rect">
+            <a:avLst/>
+          </a:prstGeom>
+          <a:noFill/>
+        </p:spPr>
+        <p:txBody>
+          <a:bodyPr wrap="square" rtlCol="1">
+            <a:spAutoFit/>
+          </a:bodyPr>
+          <a:lstStyle/>
+          <a:p>
+            <a:r>
+              <a:rPr lang="en-US" b="1" dirty="0">
+                <a:solidFill>
+                  <a:srgbClr val="F2F2F2"/>
+                </a:solidFill>
+              </a:rPr>
+              <a:t>ALPACA FORMAT INPUT (TRAIN)</a:t>
+            </a:r>
+            <a:endParaRPr lang="he-IL" b="1" dirty="0">
+              <a:solidFill>
+                <a:srgbClr val="F2F2F2"/>
+              </a:solidFill>
+            </a:endParaRPr>
+          </a:p>
+        </p:txBody>
+      </p:sp>
+    </p:spTree>
+    <p:extLst>
+      <p:ext uri="{BB962C8B-B14F-4D97-AF65-F5344CB8AC3E}">
+        <p14:creationId xmlns:p14="http://schemas.microsoft.com/office/powerpoint/2010/main" val="999475996"/>
+      </p:ext>
+    </p:extLst>
+  </p:cSld>
+  <p:clrMapOvr>
+    <a:masterClrMapping/>
+  </p:clrMapOvr>
+</p:sld>
+</file>
+
+<file path=ppt/slides/slide9.xml><?xml version="1.0" encoding="utf-8"?>
 <p:sld xmlns:a="http://schemas.openxmlformats.org/drawingml/2006/main" xmlns:r="http://schemas.openxmlformats.org/officeDocument/2006/relationships" xmlns:p="http://schemas.openxmlformats.org/presentationml/2006/main">
   <p:cSld>
     <p:spTree>
@@ -13890,15 +15737,7 @@
                   <a:srgbClr val="FFC000"/>
                 </a:solidFill>
               </a:rPr>
-              <a:t>Dual-Encoder Strategy:</a:t>
-            </a:r>
-            <a:r>
-              <a:rPr lang="en-US" sz="1800" dirty="0">
-                <a:solidFill>
-                  <a:srgbClr val="FFC000"/>
-                </a:solidFill>
-              </a:rPr>
-              <a:t> </a:t>
+              <a:t>Embedding Model: </a:t>
             </a:r>
             <a:r>
               <a:rPr lang="en-US" sz="1800" dirty="0">
@@ -14027,14 +15866,15 @@
         </p:nvPicPr>
         <p:blipFill>
           <a:blip r:embed="rId4"/>
+          <a:srcRect t="5141"/>
           <a:stretch>
             <a:fillRect/>
           </a:stretch>
         </p:blipFill>
         <p:spPr>
           <a:xfrm>
-            <a:off x="7299297" y="4544068"/>
-            <a:ext cx="3802401" cy="1736772"/>
+            <a:off x="7307480" y="4571999"/>
+            <a:ext cx="3802401" cy="1647471"/>
           </a:xfrm>
           <a:prstGeom prst="rect">
             <a:avLst/>
@@ -14045,919 +15885,6 @@
     <p:extLst>
       <p:ext uri="{BB962C8B-B14F-4D97-AF65-F5344CB8AC3E}">
         <p14:creationId xmlns:p14="http://schemas.microsoft.com/office/powerpoint/2010/main" val="4027790192"/>
-      </p:ext>
-    </p:extLst>
-  </p:cSld>
-  <p:clrMapOvr>
-    <a:masterClrMapping/>
-  </p:clrMapOvr>
-</p:sld>
-</file>
-
-<file path=ppt/slides/slide6.xml><?xml version="1.0" encoding="utf-8"?>
-<p:sld xmlns:a="http://schemas.openxmlformats.org/drawingml/2006/main" xmlns:r="http://schemas.openxmlformats.org/officeDocument/2006/relationships" xmlns:p="http://schemas.openxmlformats.org/presentationml/2006/main">
-  <p:cSld>
-    <p:spTree>
-      <p:nvGrpSpPr>
-        <p:cNvPr id="1" name="Shape 83">
-          <a:extLst>
-            <a:ext uri="{FF2B5EF4-FFF2-40B4-BE49-F238E27FC236}">
-              <a16:creationId xmlns:a16="http://schemas.microsoft.com/office/drawing/2014/main" id="{2E8A46CF-A672-E505-2376-275AABB5CF69}"/>
-            </a:ext>
-          </a:extLst>
-        </p:cNvPr>
-        <p:cNvGrpSpPr/>
-        <p:nvPr/>
-      </p:nvGrpSpPr>
-      <p:grpSpPr>
-        <a:xfrm>
-          <a:off x="0" y="0"/>
-          <a:ext cx="0" cy="0"/>
-          <a:chOff x="0" y="0"/>
-          <a:chExt cx="0" cy="0"/>
-        </a:xfrm>
-      </p:grpSpPr>
-      <p:pic>
-        <p:nvPicPr>
-          <p:cNvPr id="3" name="Google Shape;123;p15" descr="image.png">
-            <a:extLst>
-              <a:ext uri="{FF2B5EF4-FFF2-40B4-BE49-F238E27FC236}">
-                <a16:creationId xmlns:a16="http://schemas.microsoft.com/office/drawing/2014/main" id="{896705B1-AC28-F9CF-A026-B8B4037CBE78}"/>
-              </a:ext>
-            </a:extLst>
-          </p:cNvPr>
-          <p:cNvPicPr preferRelativeResize="0"/>
-          <p:nvPr/>
-        </p:nvPicPr>
-        <p:blipFill rotWithShape="1">
-          <a:blip r:embed="rId3">
-            <a:alphaModFix/>
-          </a:blip>
-          <a:srcRect/>
-          <a:stretch/>
-        </p:blipFill>
-        <p:spPr>
-          <a:xfrm>
-            <a:off x="0" y="0"/>
-            <a:ext cx="12192000" cy="6858000"/>
-          </a:xfrm>
-          <a:prstGeom prst="rect">
-            <a:avLst/>
-          </a:prstGeom>
-          <a:noFill/>
-          <a:ln>
-            <a:noFill/>
-          </a:ln>
-        </p:spPr>
-      </p:pic>
-      <p:sp>
-        <p:nvSpPr>
-          <p:cNvPr id="86" name="Google Shape;86;p13">
-            <a:extLst>
-              <a:ext uri="{FF2B5EF4-FFF2-40B4-BE49-F238E27FC236}">
-                <a16:creationId xmlns:a16="http://schemas.microsoft.com/office/drawing/2014/main" id="{B90EBA20-4154-AB19-43FD-7AC4F4EC3E4B}"/>
-              </a:ext>
-            </a:extLst>
-          </p:cNvPr>
-          <p:cNvSpPr txBox="1"/>
-          <p:nvPr/>
-        </p:nvSpPr>
-        <p:spPr>
-          <a:xfrm>
-            <a:off x="480436" y="244659"/>
-            <a:ext cx="1966162" cy="507831"/>
-          </a:xfrm>
-          <a:prstGeom prst="rect">
-            <a:avLst/>
-          </a:prstGeom>
-          <a:noFill/>
-          <a:ln>
-            <a:noFill/>
-          </a:ln>
-        </p:spPr>
-        <p:txBody>
-          <a:bodyPr spcFirstLastPara="1" wrap="square" lIns="0" tIns="0" rIns="0" bIns="0" anchor="t" anchorCtr="0">
-            <a:spAutoFit/>
-          </a:bodyPr>
-          <a:lstStyle/>
-          <a:p>
-            <a:pPr marL="0" marR="0" lvl="0" indent="0" algn="l" rtl="0">
-              <a:spcBef>
-                <a:spcPts val="0"/>
-              </a:spcBef>
-              <a:spcAft>
-                <a:spcPts val="0"/>
-              </a:spcAft>
-              <a:buNone/>
-            </a:pPr>
-            <a:r>
-              <a:rPr lang="en-US" sz="3300" b="1" i="0" u="none" strike="noStrike" cap="none" dirty="0">
-                <a:solidFill>
-                  <a:srgbClr val="F9FAFB"/>
-                </a:solidFill>
-                <a:latin typeface="Urbanist"/>
-                <a:ea typeface="Urbanist"/>
-                <a:cs typeface="Urbanist"/>
-                <a:sym typeface="Urbanist"/>
-              </a:rPr>
-              <a:t>RESULTS </a:t>
-            </a:r>
-          </a:p>
-        </p:txBody>
-      </p:sp>
-      <p:sp>
-        <p:nvSpPr>
-          <p:cNvPr id="2" name="Google Shape;127;p15">
-            <a:extLst>
-              <a:ext uri="{FF2B5EF4-FFF2-40B4-BE49-F238E27FC236}">
-                <a16:creationId xmlns:a16="http://schemas.microsoft.com/office/drawing/2014/main" id="{BD1103EA-58B3-BD26-8142-5AB3E21742AE}"/>
-              </a:ext>
-            </a:extLst>
-          </p:cNvPr>
-          <p:cNvSpPr/>
-          <p:nvPr/>
-        </p:nvSpPr>
-        <p:spPr>
-          <a:xfrm>
-            <a:off x="353255" y="244659"/>
-            <a:ext cx="57150" cy="504825"/>
-          </a:xfrm>
-          <a:prstGeom prst="rect">
-            <a:avLst/>
-          </a:prstGeom>
-          <a:solidFill>
-            <a:srgbClr val="FFC000"/>
-          </a:solidFill>
-          <a:ln>
-            <a:noFill/>
-          </a:ln>
-        </p:spPr>
-        <p:txBody>
-          <a:bodyPr spcFirstLastPara="1" wrap="square" lIns="91425" tIns="45700" rIns="91425" bIns="45700" anchor="ctr" anchorCtr="0">
-            <a:noAutofit/>
-          </a:bodyPr>
-          <a:lstStyle/>
-          <a:p>
-            <a:pPr marL="0" marR="0" lvl="0" indent="0" algn="ctr" rtl="0">
-              <a:spcBef>
-                <a:spcPts val="0"/>
-              </a:spcBef>
-              <a:spcAft>
-                <a:spcPts val="0"/>
-              </a:spcAft>
-              <a:buNone/>
-            </a:pPr>
-            <a:endParaRPr sz="1800" b="0" i="0" u="none" strike="noStrike" cap="none">
-              <a:solidFill>
-                <a:schemeClr val="dk1"/>
-              </a:solidFill>
-              <a:latin typeface="Calibri"/>
-              <a:ea typeface="Calibri"/>
-              <a:cs typeface="Calibri"/>
-              <a:sym typeface="Calibri"/>
-            </a:endParaRPr>
-          </a:p>
-        </p:txBody>
-      </p:sp>
-      <p:pic>
-        <p:nvPicPr>
-          <p:cNvPr id="6" name="Picture 5">
-            <a:extLst>
-              <a:ext uri="{FF2B5EF4-FFF2-40B4-BE49-F238E27FC236}">
-                <a16:creationId xmlns:a16="http://schemas.microsoft.com/office/drawing/2014/main" id="{71716212-072A-8CCC-4D7D-67649E7E2B77}"/>
-              </a:ext>
-            </a:extLst>
-          </p:cNvPr>
-          <p:cNvPicPr>
-            <a:picLocks noChangeAspect="1"/>
-          </p:cNvPicPr>
-          <p:nvPr/>
-        </p:nvPicPr>
-        <p:blipFill>
-          <a:blip r:embed="rId4"/>
-          <a:stretch>
-            <a:fillRect/>
-          </a:stretch>
-        </p:blipFill>
-        <p:spPr>
-          <a:xfrm>
-            <a:off x="698681" y="1676817"/>
-            <a:ext cx="5553763" cy="3321486"/>
-          </a:xfrm>
-          <a:prstGeom prst="rect">
-            <a:avLst/>
-          </a:prstGeom>
-          <a:effectLst>
-            <a:softEdge rad="63500"/>
-          </a:effectLst>
-        </p:spPr>
-      </p:pic>
-      <p:pic>
-        <p:nvPicPr>
-          <p:cNvPr id="8" name="Picture 7">
-            <a:extLst>
-              <a:ext uri="{FF2B5EF4-FFF2-40B4-BE49-F238E27FC236}">
-                <a16:creationId xmlns:a16="http://schemas.microsoft.com/office/drawing/2014/main" id="{D20224DC-FEAE-7B9A-3117-702A1C2561EA}"/>
-              </a:ext>
-            </a:extLst>
-          </p:cNvPr>
-          <p:cNvPicPr>
-            <a:picLocks noChangeAspect="1"/>
-          </p:cNvPicPr>
-          <p:nvPr/>
-        </p:nvPicPr>
-        <p:blipFill>
-          <a:blip r:embed="rId5"/>
-          <a:stretch>
-            <a:fillRect/>
-          </a:stretch>
-        </p:blipFill>
-        <p:spPr>
-          <a:xfrm>
-            <a:off x="6533195" y="336948"/>
-            <a:ext cx="4814460" cy="3000612"/>
-          </a:xfrm>
-          <a:prstGeom prst="rect">
-            <a:avLst/>
-          </a:prstGeom>
-          <a:effectLst>
-            <a:softEdge rad="50800"/>
-          </a:effectLst>
-        </p:spPr>
-      </p:pic>
-      <p:pic>
-        <p:nvPicPr>
-          <p:cNvPr id="10" name="Picture 9">
-            <a:extLst>
-              <a:ext uri="{FF2B5EF4-FFF2-40B4-BE49-F238E27FC236}">
-                <a16:creationId xmlns:a16="http://schemas.microsoft.com/office/drawing/2014/main" id="{82504B60-E309-1D67-ED79-AA7464F73F01}"/>
-              </a:ext>
-            </a:extLst>
-          </p:cNvPr>
-          <p:cNvPicPr>
-            <a:picLocks noChangeAspect="1"/>
-          </p:cNvPicPr>
-          <p:nvPr/>
-        </p:nvPicPr>
-        <p:blipFill>
-          <a:blip r:embed="rId6"/>
-          <a:stretch>
-            <a:fillRect/>
-          </a:stretch>
-        </p:blipFill>
-        <p:spPr>
-          <a:xfrm>
-            <a:off x="6533195" y="3342279"/>
-            <a:ext cx="4814460" cy="2961807"/>
-          </a:xfrm>
-          <a:prstGeom prst="rect">
-            <a:avLst/>
-          </a:prstGeom>
-          <a:effectLst>
-            <a:softEdge rad="50800"/>
-          </a:effectLst>
-        </p:spPr>
-      </p:pic>
-    </p:spTree>
-    <p:extLst>
-      <p:ext uri="{BB962C8B-B14F-4D97-AF65-F5344CB8AC3E}">
-        <p14:creationId xmlns:p14="http://schemas.microsoft.com/office/powerpoint/2010/main" val="305174031"/>
-      </p:ext>
-    </p:extLst>
-  </p:cSld>
-  <p:clrMapOvr>
-    <a:masterClrMapping/>
-  </p:clrMapOvr>
-</p:sld>
-</file>
-
-<file path=ppt/slides/slide7.xml><?xml version="1.0" encoding="utf-8"?>
-<p:sld xmlns:a="http://schemas.openxmlformats.org/drawingml/2006/main" xmlns:r="http://schemas.openxmlformats.org/officeDocument/2006/relationships" xmlns:p="http://schemas.openxmlformats.org/presentationml/2006/main">
-  <p:cSld>
-    <p:spTree>
-      <p:nvGrpSpPr>
-        <p:cNvPr id="1" name="Shape 122">
-          <a:extLst>
-            <a:ext uri="{FF2B5EF4-FFF2-40B4-BE49-F238E27FC236}">
-              <a16:creationId xmlns:a16="http://schemas.microsoft.com/office/drawing/2014/main" id="{22E84E0D-5883-201E-F623-319B3EE0E229}"/>
-            </a:ext>
-          </a:extLst>
-        </p:cNvPr>
-        <p:cNvGrpSpPr/>
-        <p:nvPr/>
-      </p:nvGrpSpPr>
-      <p:grpSpPr>
-        <a:xfrm>
-          <a:off x="0" y="0"/>
-          <a:ext cx="0" cy="0"/>
-          <a:chOff x="0" y="0"/>
-          <a:chExt cx="0" cy="0"/>
-        </a:xfrm>
-      </p:grpSpPr>
-      <p:pic>
-        <p:nvPicPr>
-          <p:cNvPr id="123" name="Google Shape;123;p15" descr="image.png">
-            <a:extLst>
-              <a:ext uri="{FF2B5EF4-FFF2-40B4-BE49-F238E27FC236}">
-                <a16:creationId xmlns:a16="http://schemas.microsoft.com/office/drawing/2014/main" id="{86D09913-DD2F-0AB0-1D0D-4D2A0961F1B6}"/>
-              </a:ext>
-            </a:extLst>
-          </p:cNvPr>
-          <p:cNvPicPr preferRelativeResize="0"/>
-          <p:nvPr/>
-        </p:nvPicPr>
-        <p:blipFill rotWithShape="1">
-          <a:blip r:embed="rId3">
-            <a:alphaModFix/>
-          </a:blip>
-          <a:srcRect/>
-          <a:stretch/>
-        </p:blipFill>
-        <p:spPr>
-          <a:xfrm>
-            <a:off x="0" y="0"/>
-            <a:ext cx="12192000" cy="6858000"/>
-          </a:xfrm>
-          <a:prstGeom prst="rect">
-            <a:avLst/>
-          </a:prstGeom>
-          <a:noFill/>
-          <a:ln>
-            <a:noFill/>
-          </a:ln>
-        </p:spPr>
-      </p:pic>
-      <p:sp>
-        <p:nvSpPr>
-          <p:cNvPr id="7" name="Google Shape;86;p13">
-            <a:extLst>
-              <a:ext uri="{FF2B5EF4-FFF2-40B4-BE49-F238E27FC236}">
-                <a16:creationId xmlns:a16="http://schemas.microsoft.com/office/drawing/2014/main" id="{A5BAD159-A290-DF82-EEA3-3C3C65E87330}"/>
-              </a:ext>
-            </a:extLst>
-          </p:cNvPr>
-          <p:cNvSpPr txBox="1"/>
-          <p:nvPr/>
-        </p:nvSpPr>
-        <p:spPr>
-          <a:xfrm>
-            <a:off x="474411" y="245556"/>
-            <a:ext cx="2925823" cy="507831"/>
-          </a:xfrm>
-          <a:prstGeom prst="rect">
-            <a:avLst/>
-          </a:prstGeom>
-          <a:noFill/>
-          <a:ln>
-            <a:noFill/>
-          </a:ln>
-        </p:spPr>
-        <p:txBody>
-          <a:bodyPr spcFirstLastPara="1" wrap="square" lIns="0" tIns="0" rIns="0" bIns="0" anchor="t" anchorCtr="0">
-            <a:spAutoFit/>
-          </a:bodyPr>
-          <a:lstStyle/>
-          <a:p>
-            <a:pPr lvl="0"/>
-            <a:r>
-              <a:rPr lang="en-US" sz="3300" b="1" dirty="0">
-                <a:solidFill>
-                  <a:schemeClr val="bg1"/>
-                </a:solidFill>
-              </a:rPr>
-              <a:t>CONCLUSION</a:t>
-            </a:r>
-            <a:endParaRPr lang="en-US" sz="3300" b="1" i="0" u="none" strike="noStrike" cap="none" dirty="0">
-              <a:solidFill>
-                <a:schemeClr val="bg1"/>
-              </a:solidFill>
-              <a:latin typeface="Urbanist"/>
-              <a:ea typeface="Urbanist"/>
-              <a:cs typeface="Urbanist"/>
-              <a:sym typeface="Urbanist"/>
-            </a:endParaRPr>
-          </a:p>
-        </p:txBody>
-      </p:sp>
-      <p:sp>
-        <p:nvSpPr>
-          <p:cNvPr id="8" name="Google Shape;88;p13">
-            <a:extLst>
-              <a:ext uri="{FF2B5EF4-FFF2-40B4-BE49-F238E27FC236}">
-                <a16:creationId xmlns:a16="http://schemas.microsoft.com/office/drawing/2014/main" id="{02E29998-45C5-4E1E-453F-38C00F17E41B}"/>
-              </a:ext>
-            </a:extLst>
-          </p:cNvPr>
-          <p:cNvSpPr txBox="1"/>
-          <p:nvPr/>
-        </p:nvSpPr>
-        <p:spPr>
-          <a:xfrm>
-            <a:off x="518186" y="2819997"/>
-            <a:ext cx="8390644" cy="430887"/>
-          </a:xfrm>
-          <a:prstGeom prst="rect">
-            <a:avLst/>
-          </a:prstGeom>
-          <a:noFill/>
-          <a:ln>
-            <a:noFill/>
-          </a:ln>
-        </p:spPr>
-        <p:txBody>
-          <a:bodyPr spcFirstLastPara="1" wrap="square" lIns="0" tIns="0" rIns="0" bIns="0" anchor="t" anchorCtr="0">
-            <a:spAutoFit/>
-          </a:bodyPr>
-          <a:lstStyle/>
-          <a:p>
-            <a:r>
-              <a:rPr lang="en-US" sz="2800" b="1" dirty="0">
-                <a:solidFill>
-                  <a:srgbClr val="FFC000"/>
-                </a:solidFill>
-              </a:rPr>
-              <a:t>Things We (Painfully) Learned:</a:t>
-            </a:r>
-            <a:endParaRPr lang="en-US" sz="2800" b="1" dirty="0">
-              <a:solidFill>
-                <a:srgbClr val="FFC000"/>
-              </a:solidFill>
-              <a:latin typeface="Urbanist"/>
-              <a:ea typeface="Urbanist"/>
-              <a:cs typeface="Urbanist"/>
-              <a:sym typeface="Urbanist"/>
-            </a:endParaRPr>
-          </a:p>
-        </p:txBody>
-      </p:sp>
-      <p:sp>
-        <p:nvSpPr>
-          <p:cNvPr id="9" name="Google Shape;127;p15">
-            <a:extLst>
-              <a:ext uri="{FF2B5EF4-FFF2-40B4-BE49-F238E27FC236}">
-                <a16:creationId xmlns:a16="http://schemas.microsoft.com/office/drawing/2014/main" id="{7DE61AA3-BDFB-53E7-8AEE-E924F9E2A63B}"/>
-              </a:ext>
-            </a:extLst>
-          </p:cNvPr>
-          <p:cNvSpPr/>
-          <p:nvPr/>
-        </p:nvSpPr>
-        <p:spPr>
-          <a:xfrm>
-            <a:off x="362845" y="238941"/>
-            <a:ext cx="57150" cy="504825"/>
-          </a:xfrm>
-          <a:prstGeom prst="rect">
-            <a:avLst/>
-          </a:prstGeom>
-          <a:solidFill>
-            <a:srgbClr val="FFC000"/>
-          </a:solidFill>
-          <a:ln>
-            <a:noFill/>
-          </a:ln>
-        </p:spPr>
-        <p:txBody>
-          <a:bodyPr spcFirstLastPara="1" wrap="square" lIns="91425" tIns="45700" rIns="91425" bIns="45700" anchor="ctr" anchorCtr="0">
-            <a:noAutofit/>
-          </a:bodyPr>
-          <a:lstStyle/>
-          <a:p>
-            <a:pPr marL="0" marR="0" lvl="0" indent="0" algn="ctr" rtl="0">
-              <a:spcBef>
-                <a:spcPts val="0"/>
-              </a:spcBef>
-              <a:spcAft>
-                <a:spcPts val="0"/>
-              </a:spcAft>
-              <a:buNone/>
-            </a:pPr>
-            <a:endParaRPr sz="1800" b="0" i="0" u="none" strike="noStrike" cap="none">
-              <a:solidFill>
-                <a:schemeClr val="dk1"/>
-              </a:solidFill>
-              <a:latin typeface="Calibri"/>
-              <a:ea typeface="Calibri"/>
-              <a:cs typeface="Calibri"/>
-              <a:sym typeface="Calibri"/>
-            </a:endParaRPr>
-          </a:p>
-        </p:txBody>
-      </p:sp>
-      <p:sp>
-        <p:nvSpPr>
-          <p:cNvPr id="10" name="Google Shape;88;p13">
-            <a:extLst>
-              <a:ext uri="{FF2B5EF4-FFF2-40B4-BE49-F238E27FC236}">
-                <a16:creationId xmlns:a16="http://schemas.microsoft.com/office/drawing/2014/main" id="{7C2C1466-1FB2-0FE8-5D35-72ED36D33363}"/>
-              </a:ext>
-            </a:extLst>
-          </p:cNvPr>
-          <p:cNvSpPr txBox="1"/>
-          <p:nvPr/>
-        </p:nvSpPr>
-        <p:spPr>
-          <a:xfrm>
-            <a:off x="518186" y="1402671"/>
-            <a:ext cx="10290836" cy="1246495"/>
-          </a:xfrm>
-          <a:prstGeom prst="rect">
-            <a:avLst/>
-          </a:prstGeom>
-          <a:noFill/>
-          <a:ln>
-            <a:noFill/>
-          </a:ln>
-        </p:spPr>
-        <p:txBody>
-          <a:bodyPr spcFirstLastPara="1" wrap="square" lIns="0" tIns="0" rIns="0" bIns="0" anchor="t" anchorCtr="0">
-            <a:spAutoFit/>
-          </a:bodyPr>
-          <a:lstStyle/>
-          <a:p>
-            <a:pPr marL="285750" indent="-285750">
-              <a:lnSpc>
-                <a:spcPct val="150000"/>
-              </a:lnSpc>
-              <a:buClr>
-                <a:srgbClr val="FFC000"/>
-              </a:buClr>
-              <a:buFont typeface="Wingdings" panose="05000000000000000000" pitchFamily="2" charset="2"/>
-              <a:buChar char="Ø"/>
-            </a:pPr>
-            <a:r>
-              <a:rPr lang="en-US" sz="1800" dirty="0">
-                <a:solidFill>
-                  <a:schemeClr val="bg1">
-                    <a:lumMod val="95000"/>
-                  </a:schemeClr>
-                </a:solidFill>
-              </a:rPr>
-              <a:t>Minor hallucinations are still present.</a:t>
-            </a:r>
-            <a:endParaRPr lang="nn-NO" sz="1800" dirty="0">
-              <a:solidFill>
-                <a:schemeClr val="bg1">
-                  <a:lumMod val="95000"/>
-                </a:schemeClr>
-              </a:solidFill>
-            </a:endParaRPr>
-          </a:p>
-          <a:p>
-            <a:pPr marL="285750" indent="-285750">
-              <a:lnSpc>
-                <a:spcPct val="150000"/>
-              </a:lnSpc>
-              <a:buClr>
-                <a:srgbClr val="FFC000"/>
-              </a:buClr>
-              <a:buFont typeface="Wingdings" panose="05000000000000000000" pitchFamily="2" charset="2"/>
-              <a:buChar char="Ø"/>
-            </a:pPr>
-            <a:r>
-              <a:rPr lang="en-US" sz="1800" dirty="0">
-                <a:solidFill>
-                  <a:schemeClr val="bg1">
-                    <a:lumMod val="95000"/>
-                  </a:schemeClr>
-                </a:solidFill>
-              </a:rPr>
-              <a:t>The model identifies the correct chunk in most cases, but consistency is not guaranteed.</a:t>
-            </a:r>
-          </a:p>
-          <a:p>
-            <a:pPr marL="285750" indent="-285750">
-              <a:lnSpc>
-                <a:spcPct val="150000"/>
-              </a:lnSpc>
-              <a:buClr>
-                <a:srgbClr val="FFC000"/>
-              </a:buClr>
-              <a:buFont typeface="Wingdings" panose="05000000000000000000" pitchFamily="2" charset="2"/>
-              <a:buChar char="Ø"/>
-            </a:pPr>
-            <a:r>
-              <a:rPr lang="en-US" sz="1800" dirty="0">
-                <a:solidFill>
-                  <a:schemeClr val="bg1">
-                    <a:lumMod val="95000"/>
-                  </a:schemeClr>
-                </a:solidFill>
-              </a:rPr>
-              <a:t>In a high-stakes domain like this, even small errors are unacceptable.</a:t>
-            </a:r>
-          </a:p>
-        </p:txBody>
-      </p:sp>
-      <p:sp>
-        <p:nvSpPr>
-          <p:cNvPr id="2" name="Google Shape;88;p13">
-            <a:extLst>
-              <a:ext uri="{FF2B5EF4-FFF2-40B4-BE49-F238E27FC236}">
-                <a16:creationId xmlns:a16="http://schemas.microsoft.com/office/drawing/2014/main" id="{68F5B512-688F-EB69-6D20-66CF92AF704D}"/>
-              </a:ext>
-            </a:extLst>
-          </p:cNvPr>
-          <p:cNvSpPr txBox="1"/>
-          <p:nvPr/>
-        </p:nvSpPr>
-        <p:spPr>
-          <a:xfrm>
-            <a:off x="518186" y="998943"/>
-            <a:ext cx="8390644" cy="430887"/>
-          </a:xfrm>
-          <a:prstGeom prst="rect">
-            <a:avLst/>
-          </a:prstGeom>
-          <a:noFill/>
-          <a:ln>
-            <a:noFill/>
-          </a:ln>
-        </p:spPr>
-        <p:txBody>
-          <a:bodyPr spcFirstLastPara="1" wrap="square" lIns="0" tIns="0" rIns="0" bIns="0" anchor="t" anchorCtr="0">
-            <a:spAutoFit/>
-          </a:bodyPr>
-          <a:lstStyle/>
-          <a:p>
-            <a:r>
-              <a:rPr lang="en-US" sz="2800" b="1" dirty="0">
-                <a:solidFill>
-                  <a:srgbClr val="FFC000"/>
-                </a:solidFill>
-              </a:rPr>
-              <a:t>Looks Good… But Can Be Better:</a:t>
-            </a:r>
-            <a:endParaRPr lang="en-US" sz="2800" b="1" dirty="0">
-              <a:solidFill>
-                <a:srgbClr val="FFC000"/>
-              </a:solidFill>
-              <a:latin typeface="Urbanist"/>
-              <a:ea typeface="Urbanist"/>
-              <a:cs typeface="Urbanist"/>
-              <a:sym typeface="Urbanist"/>
-            </a:endParaRPr>
-          </a:p>
-        </p:txBody>
-      </p:sp>
-      <p:sp>
-        <p:nvSpPr>
-          <p:cNvPr id="4" name="Google Shape;88;p13">
-            <a:extLst>
-              <a:ext uri="{FF2B5EF4-FFF2-40B4-BE49-F238E27FC236}">
-                <a16:creationId xmlns:a16="http://schemas.microsoft.com/office/drawing/2014/main" id="{7A731623-AF71-D9C4-3F4F-D36B48E9C774}"/>
-              </a:ext>
-            </a:extLst>
-          </p:cNvPr>
-          <p:cNvSpPr txBox="1"/>
-          <p:nvPr/>
-        </p:nvSpPr>
-        <p:spPr>
-          <a:xfrm>
-            <a:off x="518186" y="3256052"/>
-            <a:ext cx="10290836" cy="1246495"/>
-          </a:xfrm>
-          <a:prstGeom prst="rect">
-            <a:avLst/>
-          </a:prstGeom>
-          <a:noFill/>
-          <a:ln>
-            <a:noFill/>
-          </a:ln>
-        </p:spPr>
-        <p:txBody>
-          <a:bodyPr spcFirstLastPara="1" wrap="square" lIns="0" tIns="0" rIns="0" bIns="0" anchor="t" anchorCtr="0">
-            <a:spAutoFit/>
-          </a:bodyPr>
-          <a:lstStyle/>
-          <a:p>
-            <a:pPr marL="285750" indent="-285750">
-              <a:lnSpc>
-                <a:spcPct val="150000"/>
-              </a:lnSpc>
-              <a:buClr>
-                <a:srgbClr val="FFC000"/>
-              </a:buClr>
-              <a:buFont typeface="Wingdings" panose="05000000000000000000" pitchFamily="2" charset="2"/>
-              <a:buChar char="Ø"/>
-            </a:pPr>
-            <a:r>
-              <a:rPr lang="en-US" sz="1800" dirty="0">
-                <a:solidFill>
-                  <a:schemeClr val="bg1">
-                    <a:lumMod val="95000"/>
-                  </a:schemeClr>
-                </a:solidFill>
-              </a:rPr>
-              <a:t>Each model comes with its own pros and cons.</a:t>
-            </a:r>
-            <a:endParaRPr lang="nn-NO" sz="1800" dirty="0">
-              <a:solidFill>
-                <a:schemeClr val="bg1">
-                  <a:lumMod val="95000"/>
-                </a:schemeClr>
-              </a:solidFill>
-            </a:endParaRPr>
-          </a:p>
-          <a:p>
-            <a:pPr marL="285750" indent="-285750">
-              <a:lnSpc>
-                <a:spcPct val="150000"/>
-              </a:lnSpc>
-              <a:buClr>
-                <a:srgbClr val="FFC000"/>
-              </a:buClr>
-              <a:buFont typeface="Wingdings" panose="05000000000000000000" pitchFamily="2" charset="2"/>
-              <a:buChar char="Ø"/>
-            </a:pPr>
-            <a:r>
-              <a:rPr lang="en-US" sz="1800" dirty="0">
-                <a:solidFill>
-                  <a:schemeClr val="bg1">
-                    <a:lumMod val="95000"/>
-                  </a:schemeClr>
-                </a:solidFill>
-              </a:rPr>
-              <a:t>Hallucination handling needs to be significantly stricter.</a:t>
-            </a:r>
-          </a:p>
-          <a:p>
-            <a:pPr marL="285750" indent="-285750">
-              <a:lnSpc>
-                <a:spcPct val="150000"/>
-              </a:lnSpc>
-              <a:buClr>
-                <a:srgbClr val="FFC000"/>
-              </a:buClr>
-              <a:buFont typeface="Wingdings" panose="05000000000000000000" pitchFamily="2" charset="2"/>
-              <a:buChar char="Ø"/>
-            </a:pPr>
-            <a:r>
-              <a:rPr lang="en-US" sz="1800" dirty="0">
-                <a:solidFill>
-                  <a:schemeClr val="bg1">
-                    <a:lumMod val="95000"/>
-                  </a:schemeClr>
-                </a:solidFill>
-              </a:rPr>
-              <a:t>A diverse set of KPIs is needed to properly evaluate model quality.</a:t>
-            </a:r>
-          </a:p>
-        </p:txBody>
-      </p:sp>
-      <p:sp>
-        <p:nvSpPr>
-          <p:cNvPr id="5" name="Google Shape;88;p13">
-            <a:extLst>
-              <a:ext uri="{FF2B5EF4-FFF2-40B4-BE49-F238E27FC236}">
-                <a16:creationId xmlns:a16="http://schemas.microsoft.com/office/drawing/2014/main" id="{EE9F0940-BEB7-7F69-4337-5B01468429BD}"/>
-              </a:ext>
-            </a:extLst>
-          </p:cNvPr>
-          <p:cNvSpPr txBox="1"/>
-          <p:nvPr/>
-        </p:nvSpPr>
-        <p:spPr>
-          <a:xfrm>
-            <a:off x="518186" y="4673378"/>
-            <a:ext cx="8390644" cy="430887"/>
-          </a:xfrm>
-          <a:prstGeom prst="rect">
-            <a:avLst/>
-          </a:prstGeom>
-          <a:noFill/>
-          <a:ln>
-            <a:noFill/>
-          </a:ln>
-        </p:spPr>
-        <p:txBody>
-          <a:bodyPr spcFirstLastPara="1" wrap="square" lIns="0" tIns="0" rIns="0" bIns="0" anchor="t" anchorCtr="0">
-            <a:spAutoFit/>
-          </a:bodyPr>
-          <a:lstStyle/>
-          <a:p>
-            <a:r>
-              <a:rPr lang="en-US" sz="2800" b="1" dirty="0">
-                <a:solidFill>
-                  <a:srgbClr val="FFC000"/>
-                </a:solidFill>
-              </a:rPr>
-              <a:t>Where Do We Go From Here?</a:t>
-            </a:r>
-            <a:endParaRPr lang="en-US" sz="2800" b="1" dirty="0">
-              <a:solidFill>
-                <a:srgbClr val="FFC000"/>
-              </a:solidFill>
-              <a:latin typeface="Urbanist"/>
-              <a:ea typeface="Urbanist"/>
-              <a:cs typeface="Urbanist"/>
-              <a:sym typeface="Urbanist"/>
-            </a:endParaRPr>
-          </a:p>
-        </p:txBody>
-      </p:sp>
-      <p:sp>
-        <p:nvSpPr>
-          <p:cNvPr id="6" name="Google Shape;88;p13">
-            <a:extLst>
-              <a:ext uri="{FF2B5EF4-FFF2-40B4-BE49-F238E27FC236}">
-                <a16:creationId xmlns:a16="http://schemas.microsoft.com/office/drawing/2014/main" id="{F7AA6849-9885-F48C-208C-4D449D98E7BA}"/>
-              </a:ext>
-            </a:extLst>
-          </p:cNvPr>
-          <p:cNvSpPr txBox="1"/>
-          <p:nvPr/>
-        </p:nvSpPr>
-        <p:spPr>
-          <a:xfrm>
-            <a:off x="518186" y="5104265"/>
-            <a:ext cx="10290836" cy="1246495"/>
-          </a:xfrm>
-          <a:prstGeom prst="rect">
-            <a:avLst/>
-          </a:prstGeom>
-          <a:noFill/>
-          <a:ln>
-            <a:noFill/>
-          </a:ln>
-        </p:spPr>
-        <p:txBody>
-          <a:bodyPr spcFirstLastPara="1" wrap="square" lIns="0" tIns="0" rIns="0" bIns="0" anchor="t" anchorCtr="0">
-            <a:spAutoFit/>
-          </a:bodyPr>
-          <a:lstStyle/>
-          <a:p>
-            <a:pPr marL="285750" indent="-285750">
-              <a:lnSpc>
-                <a:spcPct val="150000"/>
-              </a:lnSpc>
-              <a:buClr>
-                <a:srgbClr val="FFC000"/>
-              </a:buClr>
-              <a:buFont typeface="Wingdings" panose="05000000000000000000" pitchFamily="2" charset="2"/>
-              <a:buChar char="Ø"/>
-            </a:pPr>
-            <a:r>
-              <a:rPr lang="en-US" sz="1800" dirty="0">
-                <a:solidFill>
-                  <a:schemeClr val="bg1">
-                    <a:lumMod val="95000"/>
-                  </a:schemeClr>
-                </a:solidFill>
-              </a:rPr>
-              <a:t>Experiment with additional models and architectures. </a:t>
-            </a:r>
-          </a:p>
-          <a:p>
-            <a:pPr marL="285750" indent="-285750">
-              <a:lnSpc>
-                <a:spcPct val="150000"/>
-              </a:lnSpc>
-              <a:buClr>
-                <a:srgbClr val="FFC000"/>
-              </a:buClr>
-              <a:buFont typeface="Wingdings" panose="05000000000000000000" pitchFamily="2" charset="2"/>
-              <a:buChar char="Ø"/>
-            </a:pPr>
-            <a:r>
-              <a:rPr lang="en-US" sz="1800" dirty="0">
-                <a:solidFill>
-                  <a:schemeClr val="bg1">
-                    <a:lumMod val="95000"/>
-                  </a:schemeClr>
-                </a:solidFill>
-              </a:rPr>
-              <a:t>Introduce more rigorous validation and consistency checks in the RAG pipeline.</a:t>
-            </a:r>
-          </a:p>
-          <a:p>
-            <a:pPr marL="285750" indent="-285750">
-              <a:lnSpc>
-                <a:spcPct val="150000"/>
-              </a:lnSpc>
-              <a:buClr>
-                <a:srgbClr val="FFC000"/>
-              </a:buClr>
-              <a:buFont typeface="Wingdings" panose="05000000000000000000" pitchFamily="2" charset="2"/>
-              <a:buChar char="Ø"/>
-            </a:pPr>
-            <a:r>
-              <a:rPr lang="en-US" sz="1800" dirty="0">
-                <a:solidFill>
-                  <a:schemeClr val="bg1">
-                    <a:lumMod val="95000"/>
-                  </a:schemeClr>
-                </a:solidFill>
-              </a:rPr>
-              <a:t>Add a faithfulness metric using an LLM judge to verify citation-explanation alignment. </a:t>
-            </a:r>
-          </a:p>
-        </p:txBody>
-      </p:sp>
-    </p:spTree>
-    <p:extLst>
-      <p:ext uri="{BB962C8B-B14F-4D97-AF65-F5344CB8AC3E}">
-        <p14:creationId xmlns:p14="http://schemas.microsoft.com/office/powerpoint/2010/main" val="2600582393"/>
       </p:ext>
     </p:extLst>
   </p:cSld>
